--- a/modulos/04-python-dados/sessao-ao-vivo-python-dados.pptx
+++ b/modulos/04-python-dados/sessao-ao-vivo-python-dados.pptx
@@ -2,26 +2,26 @@
 <file path=ppt/presentation.xml><?xml version="1.0" encoding="utf-8"?>
 <p:presentation xmlns:p="http://schemas.openxmlformats.org/presentationml/2006/main">
   <p:sldMasterIdLst>
-    <p:sldMasterId xmlns:r="http://schemas.openxmlformats.org/officeDocument/2006/relationships" id="2147483648" r:id="Rbeaccaab55a3431f"/>
+    <p:sldMasterId xmlns:r="http://schemas.openxmlformats.org/officeDocument/2006/relationships" id="2147483648" r:id="R9e0e7ecea2ad44ee"/>
   </p:sldMasterIdLst>
   <p:notesMasterIdLst>
-    <p:notesMasterId xmlns:r="http://schemas.openxmlformats.org/officeDocument/2006/relationships" r:id="R7b0b5e4979894ec2"/>
+    <p:notesMasterId xmlns:r="http://schemas.openxmlformats.org/officeDocument/2006/relationships" r:id="R574880d822f5435b"/>
   </p:notesMasterIdLst>
   <p:sldIdLst>
-    <p:sldId xmlns:r="http://schemas.openxmlformats.org/officeDocument/2006/relationships" id="256" r:id="Re1866105339b410f"/>
-    <p:sldId xmlns:r="http://schemas.openxmlformats.org/officeDocument/2006/relationships" id="257" r:id="R8d627b90ed2e4f98"/>
-    <p:sldId xmlns:r="http://schemas.openxmlformats.org/officeDocument/2006/relationships" id="258" r:id="Ra2750347fc5e448f"/>
-    <p:sldId xmlns:r="http://schemas.openxmlformats.org/officeDocument/2006/relationships" id="259" r:id="R2f57e47aa81e424d"/>
-    <p:sldId xmlns:r="http://schemas.openxmlformats.org/officeDocument/2006/relationships" id="260" r:id="R48c41ce254894f6a"/>
-    <p:sldId xmlns:r="http://schemas.openxmlformats.org/officeDocument/2006/relationships" id="261" r:id="R2ed7c474e6e94f45"/>
-    <p:sldId xmlns:r="http://schemas.openxmlformats.org/officeDocument/2006/relationships" id="262" r:id="R5472f24d40b5431e"/>
-    <p:sldId xmlns:r="http://schemas.openxmlformats.org/officeDocument/2006/relationships" id="263" r:id="R38cf1754153c4ec4"/>
-    <p:sldId xmlns:r="http://schemas.openxmlformats.org/officeDocument/2006/relationships" id="264" r:id="R552124190b324f06"/>
-    <p:sldId xmlns:r="http://schemas.openxmlformats.org/officeDocument/2006/relationships" id="265" r:id="Rc9db147f68464b31"/>
-    <p:sldId xmlns:r="http://schemas.openxmlformats.org/officeDocument/2006/relationships" id="266" r:id="R60feb62bc9b44af2"/>
-    <p:sldId xmlns:r="http://schemas.openxmlformats.org/officeDocument/2006/relationships" id="267" r:id="R54fab09e248d47de"/>
-    <p:sldId xmlns:r="http://schemas.openxmlformats.org/officeDocument/2006/relationships" id="268" r:id="R2ed0d4b3553d42a8"/>
-    <p:sldId xmlns:r="http://schemas.openxmlformats.org/officeDocument/2006/relationships" id="269" r:id="R1c55e4b814d641c0"/>
+    <p:sldId xmlns:r="http://schemas.openxmlformats.org/officeDocument/2006/relationships" id="256" r:id="Rcb6cc13ca8704c50"/>
+    <p:sldId xmlns:r="http://schemas.openxmlformats.org/officeDocument/2006/relationships" id="257" r:id="Rbd0c2c64e6ee4263"/>
+    <p:sldId xmlns:r="http://schemas.openxmlformats.org/officeDocument/2006/relationships" id="258" r:id="Ra0477d03561442e1"/>
+    <p:sldId xmlns:r="http://schemas.openxmlformats.org/officeDocument/2006/relationships" id="259" r:id="Raa0c84ec4b0d43cc"/>
+    <p:sldId xmlns:r="http://schemas.openxmlformats.org/officeDocument/2006/relationships" id="260" r:id="R8785e11015084979"/>
+    <p:sldId xmlns:r="http://schemas.openxmlformats.org/officeDocument/2006/relationships" id="261" r:id="R5fc5f1f366bb412e"/>
+    <p:sldId xmlns:r="http://schemas.openxmlformats.org/officeDocument/2006/relationships" id="262" r:id="R15ea7728d6e44b98"/>
+    <p:sldId xmlns:r="http://schemas.openxmlformats.org/officeDocument/2006/relationships" id="263" r:id="R124fc3502dfe4f90"/>
+    <p:sldId xmlns:r="http://schemas.openxmlformats.org/officeDocument/2006/relationships" id="264" r:id="R89217017119a4c0c"/>
+    <p:sldId xmlns:r="http://schemas.openxmlformats.org/officeDocument/2006/relationships" id="265" r:id="Rba96444b43fe4ed1"/>
+    <p:sldId xmlns:r="http://schemas.openxmlformats.org/officeDocument/2006/relationships" id="266" r:id="R8de53be8e3204efe"/>
+    <p:sldId xmlns:r="http://schemas.openxmlformats.org/officeDocument/2006/relationships" id="267" r:id="R5a9ed252851a43e2"/>
+    <p:sldId xmlns:r="http://schemas.openxmlformats.org/officeDocument/2006/relationships" id="268" r:id="R6d684e148f1649cd"/>
+    <p:sldId xmlns:r="http://schemas.openxmlformats.org/officeDocument/2006/relationships" id="269" r:id="Rcd8a4caa9cb14559"/>
   </p:sldIdLst>
   <p:sldSz cx="12192000" cy="6858000"/>
   <p:notesSz cx="6858000" cy="9144000"/>
@@ -1426,7 +1426,7 @@
   </p:cSld>
   <p:clrMap bg1="lt1" tx1="dk1" bg2="lt2" tx2="dk2" accent1="accent1" accent2="accent2" accent3="accent3" accent4="accent4" accent5="accent5" accent6="accent6" hlink="hlink" folHlink="folHlink"/>
   <p:sldLayoutIdLst>
-    <p:sldLayoutId xmlns:r="http://schemas.openxmlformats.org/officeDocument/2006/relationships" id="2147483649" r:id="Rd3b19fae8d0c4f01"/>
+    <p:sldLayoutId xmlns:r="http://schemas.openxmlformats.org/officeDocument/2006/relationships" id="2147483649" r:id="R838d12f894c44117"/>
   </p:sldLayoutIdLst>
   <p:txStyles>
     <p:titleStyle>
@@ -1714,7 +1714,7 @@
     <p:bg>
       <p:bgPr>
         <a:solidFill xmlns:a="http://schemas.openxmlformats.org/drawingml/2006/main">
-          <a:srgbClr val="0E1B3E"/>
+          <a:srgbClr val="070F26"/>
         </a:solidFill>
       </p:bgPr>
     </p:bg>
@@ -1732,7 +1732,7 @@
           <p:cNvPr id="1" name="">
             <a:extLst xmlns:a="http://schemas.openxmlformats.org/drawingml/2006/main">
               <a:ext uri="{FF2B5EF4-FFF2-40B4-BE49-F238E27FC236}">
-                <a16:creationId xmlns:a16="http://schemas.microsoft.com/office/drawing/2014/main" id="{53CD5FDE-1E7C-4E6A-B331-88B02802B766}"/>
+                <a16:creationId xmlns:a16="http://schemas.microsoft.com/office/drawing/2014/main" id="{03969881-D5F6-4744-AE88-887D883A40B5}"/>
               </a:ext>
             </a:extLst>
           </p:cNvPr>
@@ -1750,7 +1750,7 @@
             <a:avLst/>
           </a:prstGeom>
           <a:solidFill xmlns:a="http://schemas.openxmlformats.org/drawingml/2006/main">
-            <a:srgbClr val="0E1B3E"/>
+            <a:srgbClr val="070F26"/>
           </a:solidFill>
           <a:ln xmlns:a="http://schemas.openxmlformats.org/drawingml/2006/main" w="0">
             <a:solidFill>
@@ -1771,7 +1771,7 @@
           <p:nvPr/>
         </p:nvPicPr>
         <p:blipFill>
-          <a:blip xmlns:r="http://schemas.openxmlformats.org/officeDocument/2006/relationships" xmlns:a="http://schemas.openxmlformats.org/drawingml/2006/main" r:embed="Rfc9fcd6dfade4b62"/>
+          <a:blip xmlns:r="http://schemas.openxmlformats.org/officeDocument/2006/relationships" xmlns:a="http://schemas.openxmlformats.org/drawingml/2006/main" r:embed="R400ef772ae3c4b01"/>
           <a:stretch xmlns:a="http://schemas.openxmlformats.org/drawingml/2006/main"/>
         </p:blipFill>
         <p:spPr>
@@ -1789,7 +1789,7 @@
           <p:cNvPr id="3" name="">
             <a:extLst xmlns:a="http://schemas.openxmlformats.org/drawingml/2006/main">
               <a:ext uri="{FF2B5EF4-FFF2-40B4-BE49-F238E27FC236}">
-                <a16:creationId xmlns:a16="http://schemas.microsoft.com/office/drawing/2014/main" id="{D95B7CC7-2209-4317-A944-041B6B12CE29}"/>
+                <a16:creationId xmlns:a16="http://schemas.microsoft.com/office/drawing/2014/main" id="{25FADA57-BB86-4AAE-A396-461F139C12FF}"/>
               </a:ext>
             </a:extLst>
           </p:cNvPr>
@@ -1847,7 +1847,7 @@
           <p:cNvPr id="4" name="">
             <a:extLst xmlns:a="http://schemas.openxmlformats.org/drawingml/2006/main">
               <a:ext uri="{FF2B5EF4-FFF2-40B4-BE49-F238E27FC236}">
-                <a16:creationId xmlns:a16="http://schemas.microsoft.com/office/drawing/2014/main" id="{F357B25D-363C-443B-A954-C617AB0549BE}"/>
+                <a16:creationId xmlns:a16="http://schemas.microsoft.com/office/drawing/2014/main" id="{C649CB55-FBDC-4ADD-81C6-24F1717013EB}"/>
               </a:ext>
             </a:extLst>
           </p:cNvPr>
@@ -1905,7 +1905,7 @@
           <p:cNvPr id="5" name="">
             <a:extLst xmlns:a="http://schemas.openxmlformats.org/drawingml/2006/main">
               <a:ext uri="{FF2B5EF4-FFF2-40B4-BE49-F238E27FC236}">
-                <a16:creationId xmlns:a16="http://schemas.microsoft.com/office/drawing/2014/main" id="{885F9975-4BCC-4ADC-880A-3704CBE33B5B}"/>
+                <a16:creationId xmlns:a16="http://schemas.microsoft.com/office/drawing/2014/main" id="{0558123A-9D2C-4E0A-A6B9-34F5A0607302}"/>
               </a:ext>
             </a:extLst>
           </p:cNvPr>
@@ -1967,7 +1967,7 @@
           <p:nvPr/>
         </p:nvPicPr>
         <p:blipFill>
-          <a:blip xmlns:r="http://schemas.openxmlformats.org/officeDocument/2006/relationships" xmlns:a="http://schemas.openxmlformats.org/drawingml/2006/main" r:embed="Rdb2eb5bf52fc4a78"/>
+          <a:blip xmlns:r="http://schemas.openxmlformats.org/officeDocument/2006/relationships" xmlns:a="http://schemas.openxmlformats.org/drawingml/2006/main" r:embed="R243b0bbb748f4b3e"/>
           <a:stretch xmlns:a="http://schemas.openxmlformats.org/drawingml/2006/main"/>
         </p:blipFill>
         <p:spPr>
@@ -1985,7 +1985,7 @@
           <p:cNvPr id="7" name="">
             <a:extLst xmlns:a="http://schemas.openxmlformats.org/drawingml/2006/main">
               <a:ext uri="{FF2B5EF4-FFF2-40B4-BE49-F238E27FC236}">
-                <a16:creationId xmlns:a16="http://schemas.microsoft.com/office/drawing/2014/main" id="{7BBF2C81-FE95-4B37-8CCA-6C42A0846CED}"/>
+                <a16:creationId xmlns:a16="http://schemas.microsoft.com/office/drawing/2014/main" id="{AF134518-13C6-4502-AF00-4685EF92E6D0}"/>
               </a:ext>
             </a:extLst>
           </p:cNvPr>
@@ -2043,7 +2043,7 @@
           <p:cNvPr id="8" name="">
             <a:extLst xmlns:a="http://schemas.openxmlformats.org/drawingml/2006/main">
               <a:ext uri="{FF2B5EF4-FFF2-40B4-BE49-F238E27FC236}">
-                <a16:creationId xmlns:a16="http://schemas.microsoft.com/office/drawing/2014/main" id="{2D93E1DE-52D3-4136-86E7-EBFC9FD86FF9}"/>
+                <a16:creationId xmlns:a16="http://schemas.microsoft.com/office/drawing/2014/main" id="{FAFD24CB-23B4-4C7A-BB41-7ED0C801C9E5}"/>
               </a:ext>
             </a:extLst>
           </p:cNvPr>
@@ -2101,7 +2101,7 @@
           <p:cNvPr id="9" name="">
             <a:extLst xmlns:a="http://schemas.openxmlformats.org/drawingml/2006/main">
               <a:ext uri="{FF2B5EF4-FFF2-40B4-BE49-F238E27FC236}">
-                <a16:creationId xmlns:a16="http://schemas.microsoft.com/office/drawing/2014/main" id="{BF1D80D3-5116-4C0B-8238-FFF4C3B072C9}"/>
+                <a16:creationId xmlns:a16="http://schemas.microsoft.com/office/drawing/2014/main" id="{53CD929C-CCDC-4C54-AA70-F123E3CBAC14}"/>
               </a:ext>
             </a:extLst>
           </p:cNvPr>
@@ -2159,7 +2159,7 @@
           <p:cNvPr id="10" name="">
             <a:extLst xmlns:a="http://schemas.openxmlformats.org/drawingml/2006/main">
               <a:ext uri="{FF2B5EF4-FFF2-40B4-BE49-F238E27FC236}">
-                <a16:creationId xmlns:a16="http://schemas.microsoft.com/office/drawing/2014/main" id="{ACC4ADAB-07F1-4D18-8B8E-27892C29120E}"/>
+                <a16:creationId xmlns:a16="http://schemas.microsoft.com/office/drawing/2014/main" id="{4CA8C9BC-1705-45B7-B67F-4A2F8F1AA00E}"/>
               </a:ext>
             </a:extLst>
           </p:cNvPr>
@@ -2194,7 +2194,7 @@
           <p:cNvPr id="11" name="">
             <a:extLst xmlns:a="http://schemas.openxmlformats.org/drawingml/2006/main">
               <a:ext uri="{FF2B5EF4-FFF2-40B4-BE49-F238E27FC236}">
-                <a16:creationId xmlns:a16="http://schemas.microsoft.com/office/drawing/2014/main" id="{598C8E3F-420F-4567-8887-FD3BDE556A50}"/>
+                <a16:creationId xmlns:a16="http://schemas.microsoft.com/office/drawing/2014/main" id="{B138A1D5-C8BD-4AA0-90A8-E1AF69F8A464}"/>
               </a:ext>
             </a:extLst>
           </p:cNvPr>
@@ -2250,7 +2250,7 @@
     </p:spTree>
     <p:extLst>
       <p:ext uri="{BB962C8B-B14F-4D97-AF65-F5344CB8AC3E}">
-        <p14:creationId xmlns:p14="http://schemas.microsoft.com/office/powerpoint/2010/main" val="1714576843"/>
+        <p14:creationId xmlns:p14="http://schemas.microsoft.com/office/powerpoint/2010/main" val="30534591"/>
       </p:ext>
     </p:extLst>
   </p:cSld>
@@ -2281,7 +2281,7 @@
           <p:cNvPr id="1" name="">
             <a:extLst xmlns:a="http://schemas.openxmlformats.org/drawingml/2006/main">
               <a:ext uri="{FF2B5EF4-FFF2-40B4-BE49-F238E27FC236}">
-                <a16:creationId xmlns:a16="http://schemas.microsoft.com/office/drawing/2014/main" id="{EFBFE9AD-1072-45A9-9DB2-3CB28FB4E960}"/>
+                <a16:creationId xmlns:a16="http://schemas.microsoft.com/office/drawing/2014/main" id="{10B2F3D5-0416-4B69-95AB-437E15AA136E}"/>
               </a:ext>
             </a:extLst>
           </p:cNvPr>
@@ -2320,7 +2320,7 @@
           <p:nvPr/>
         </p:nvPicPr>
         <p:blipFill>
-          <a:blip xmlns:r="http://schemas.openxmlformats.org/officeDocument/2006/relationships" xmlns:a="http://schemas.openxmlformats.org/drawingml/2006/main" r:embed="R286ac35f06854adc"/>
+          <a:blip xmlns:r="http://schemas.openxmlformats.org/officeDocument/2006/relationships" xmlns:a="http://schemas.openxmlformats.org/drawingml/2006/main" r:embed="Rc27fb6d0ad414aa3"/>
           <a:stretch xmlns:a="http://schemas.openxmlformats.org/drawingml/2006/main"/>
         </p:blipFill>
         <p:spPr>
@@ -2338,7 +2338,7 @@
           <p:cNvPr id="3" name="">
             <a:extLst xmlns:a="http://schemas.openxmlformats.org/drawingml/2006/main">
               <a:ext uri="{FF2B5EF4-FFF2-40B4-BE49-F238E27FC236}">
-                <a16:creationId xmlns:a16="http://schemas.microsoft.com/office/drawing/2014/main" id="{E9F6623E-5FB6-4952-8F3A-9B73D16B238E}"/>
+                <a16:creationId xmlns:a16="http://schemas.microsoft.com/office/drawing/2014/main" id="{6FAA0760-FFB1-49AE-B28F-2604C4756A62}"/>
               </a:ext>
             </a:extLst>
           </p:cNvPr>
@@ -2376,14 +2376,14 @@
             <a:pPr algn="r">
               <a:defRPr sz="825" b="1">
                 <a:solidFill>
-                  <a:srgbClr val="0E1B3E"/>
+                  <a:srgbClr val="070F26"/>
                 </a:solidFill>
               </a:defRPr>
             </a:pPr>
             <a:r>
               <a:rPr sz="825" b="1">
                 <a:solidFill>
-                  <a:srgbClr val="0E1B3E"/>
+                  <a:srgbClr val="070F26"/>
                 </a:solidFill>
               </a:rPr>
               <a:t>NTT DATA UNIVERSITY</a:t>
@@ -2396,7 +2396,7 @@
           <p:cNvPr id="4" name="">
             <a:extLst xmlns:a="http://schemas.openxmlformats.org/drawingml/2006/main">
               <a:ext uri="{FF2B5EF4-FFF2-40B4-BE49-F238E27FC236}">
-                <a16:creationId xmlns:a16="http://schemas.microsoft.com/office/drawing/2014/main" id="{72937EC6-F259-4171-B296-35BA2BA5DAA6}"/>
+                <a16:creationId xmlns:a16="http://schemas.microsoft.com/office/drawing/2014/main" id="{F2473EBE-74FF-4625-B57F-02BDC7A4566D}"/>
               </a:ext>
             </a:extLst>
           </p:cNvPr>
@@ -2454,7 +2454,7 @@
           <p:cNvPr id="5" name="">
             <a:extLst xmlns:a="http://schemas.openxmlformats.org/drawingml/2006/main">
               <a:ext uri="{FF2B5EF4-FFF2-40B4-BE49-F238E27FC236}">
-                <a16:creationId xmlns:a16="http://schemas.microsoft.com/office/drawing/2014/main" id="{230DB3AD-C669-4137-AF71-396F047DD9C4}"/>
+                <a16:creationId xmlns:a16="http://schemas.microsoft.com/office/drawing/2014/main" id="{3057FD3F-F722-493C-ABBA-9A5A184F4DD7}"/>
               </a:ext>
             </a:extLst>
           </p:cNvPr>
@@ -2512,7 +2512,7 @@
           <p:cNvPr id="6" name="">
             <a:extLst xmlns:a="http://schemas.openxmlformats.org/drawingml/2006/main">
               <a:ext uri="{FF2B5EF4-FFF2-40B4-BE49-F238E27FC236}">
-                <a16:creationId xmlns:a16="http://schemas.microsoft.com/office/drawing/2014/main" id="{387B557B-097A-4E5F-851D-4D813B2C3F90}"/>
+                <a16:creationId xmlns:a16="http://schemas.microsoft.com/office/drawing/2014/main" id="{F7A18A74-8D49-4B38-89D6-5324FFB6D1F5}"/>
               </a:ext>
             </a:extLst>
           </p:cNvPr>
@@ -2550,14 +2550,14 @@
             <a:pPr algn="r">
               <a:defRPr sz="675" b="1">
                 <a:solidFill>
-                  <a:srgbClr val="0E1B3E"/>
+                  <a:srgbClr val="070F26"/>
                 </a:solidFill>
               </a:defRPr>
             </a:pPr>
             <a:r>
               <a:rPr sz="675" b="1">
                 <a:solidFill>
-                  <a:srgbClr val="0E1B3E"/>
+                  <a:srgbClr val="070F26"/>
                 </a:solidFill>
               </a:rPr>
               <a:t>NTT DATA UNIVERSITY</a:t>
@@ -2570,7 +2570,7 @@
           <p:cNvPr id="7" name="">
             <a:extLst xmlns:a="http://schemas.openxmlformats.org/drawingml/2006/main">
               <a:ext uri="{FF2B5EF4-FFF2-40B4-BE49-F238E27FC236}">
-                <a16:creationId xmlns:a16="http://schemas.microsoft.com/office/drawing/2014/main" id="{AD03CB6E-8570-4506-8C2C-AD8467AAE20F}"/>
+                <a16:creationId xmlns:a16="http://schemas.microsoft.com/office/drawing/2014/main" id="{BFA898E7-CA22-463F-B62F-072C64A7FC8F}"/>
               </a:ext>
             </a:extLst>
           </p:cNvPr>
@@ -2628,7 +2628,7 @@
           <p:cNvPr id="8" name="">
             <a:extLst xmlns:a="http://schemas.openxmlformats.org/drawingml/2006/main">
               <a:ext uri="{FF2B5EF4-FFF2-40B4-BE49-F238E27FC236}">
-                <a16:creationId xmlns:a16="http://schemas.microsoft.com/office/drawing/2014/main" id="{CDB195AE-E2B0-47B4-AF4B-CC31C428A7ED}"/>
+                <a16:creationId xmlns:a16="http://schemas.microsoft.com/office/drawing/2014/main" id="{16C1C32E-0712-41DC-A19D-A185B73968D6}"/>
               </a:ext>
             </a:extLst>
           </p:cNvPr>
@@ -2666,14 +2666,14 @@
             <a:pPr algn="l">
               <a:defRPr sz="2400" b="0">
                 <a:solidFill>
-                  <a:srgbClr val="0E1B3E"/>
+                  <a:srgbClr val="070F26"/>
                 </a:solidFill>
               </a:defRPr>
             </a:pPr>
             <a:r>
               <a:rPr sz="2400" b="0">
                 <a:solidFill>
-                  <a:srgbClr val="0E1B3E"/>
+                  <a:srgbClr val="070F26"/>
                 </a:solidFill>
               </a:rPr>
               <a:t>O que acontece se valor_total vier com nulos?</a:t>
@@ -2686,7 +2686,7 @@
           <p:cNvPr id="9" name="">
             <a:extLst xmlns:a="http://schemas.openxmlformats.org/drawingml/2006/main">
               <a:ext uri="{FF2B5EF4-FFF2-40B4-BE49-F238E27FC236}">
-                <a16:creationId xmlns:a16="http://schemas.microsoft.com/office/drawing/2014/main" id="{DEDA9E69-7609-4387-84FC-456B60A0F2ED}"/>
+                <a16:creationId xmlns:a16="http://schemas.microsoft.com/office/drawing/2014/main" id="{6C701926-A01A-486C-8924-C50692FFF9AA}"/>
               </a:ext>
             </a:extLst>
           </p:cNvPr>
@@ -2744,7 +2744,7 @@
           <p:cNvPr id="10" name="">
             <a:extLst xmlns:a="http://schemas.openxmlformats.org/drawingml/2006/main">
               <a:ext uri="{FF2B5EF4-FFF2-40B4-BE49-F238E27FC236}">
-                <a16:creationId xmlns:a16="http://schemas.microsoft.com/office/drawing/2014/main" id="{23935BCD-06A6-42C5-B946-B95AFBAFB12D}"/>
+                <a16:creationId xmlns:a16="http://schemas.microsoft.com/office/drawing/2014/main" id="{C6838F85-806F-4F80-8B50-1080E5316A2C}"/>
               </a:ext>
             </a:extLst>
           </p:cNvPr>
@@ -2777,7 +2777,7 @@
           <p:cNvPr id="11" name="">
             <a:extLst xmlns:a="http://schemas.openxmlformats.org/drawingml/2006/main">
               <a:ext uri="{FF2B5EF4-FFF2-40B4-BE49-F238E27FC236}">
-                <a16:creationId xmlns:a16="http://schemas.microsoft.com/office/drawing/2014/main" id="{2A2FACE8-B565-4F1E-8B66-B396942DBAA2}"/>
+                <a16:creationId xmlns:a16="http://schemas.microsoft.com/office/drawing/2014/main" id="{B1E7F257-CBA8-48EB-AC34-86A624834D35}"/>
               </a:ext>
             </a:extLst>
           </p:cNvPr>
@@ -2812,7 +2812,7 @@
           <p:cNvPr id="12" name="">
             <a:extLst xmlns:a="http://schemas.openxmlformats.org/drawingml/2006/main">
               <a:ext uri="{FF2B5EF4-FFF2-40B4-BE49-F238E27FC236}">
-                <a16:creationId xmlns:a16="http://schemas.microsoft.com/office/drawing/2014/main" id="{ED9F77F0-F950-4147-AED9-775FA8793BCE}"/>
+                <a16:creationId xmlns:a16="http://schemas.microsoft.com/office/drawing/2014/main" id="{D6F18505-066B-46CE-895B-1AE7F3BC4A2C}"/>
               </a:ext>
             </a:extLst>
           </p:cNvPr>
@@ -2870,7 +2870,7 @@
           <p:cNvPr id="13" name="">
             <a:extLst xmlns:a="http://schemas.openxmlformats.org/drawingml/2006/main">
               <a:ext uri="{FF2B5EF4-FFF2-40B4-BE49-F238E27FC236}">
-                <a16:creationId xmlns:a16="http://schemas.microsoft.com/office/drawing/2014/main" id="{AEC5026F-D4B5-4A37-9BE3-92626E7ACB1B}"/>
+                <a16:creationId xmlns:a16="http://schemas.microsoft.com/office/drawing/2014/main" id="{F9B4628E-2054-4154-B50C-743682B53461}"/>
               </a:ext>
             </a:extLst>
           </p:cNvPr>
@@ -2962,7 +2962,7 @@
           <p:cNvPr id="14" name="">
             <a:extLst xmlns:a="http://schemas.openxmlformats.org/drawingml/2006/main">
               <a:ext uri="{FF2B5EF4-FFF2-40B4-BE49-F238E27FC236}">
-                <a16:creationId xmlns:a16="http://schemas.microsoft.com/office/drawing/2014/main" id="{C163A501-0855-4F2A-ADF5-305B18624391}"/>
+                <a16:creationId xmlns:a16="http://schemas.microsoft.com/office/drawing/2014/main" id="{0BE5473F-EDD8-44C1-873B-DDE5F47CAC79}"/>
               </a:ext>
             </a:extLst>
           </p:cNvPr>
@@ -2995,7 +2995,7 @@
           <p:cNvPr id="15" name="">
             <a:extLst xmlns:a="http://schemas.openxmlformats.org/drawingml/2006/main">
               <a:ext uri="{FF2B5EF4-FFF2-40B4-BE49-F238E27FC236}">
-                <a16:creationId xmlns:a16="http://schemas.microsoft.com/office/drawing/2014/main" id="{449ED43F-ACC5-49C0-8184-B1F261F8C077}"/>
+                <a16:creationId xmlns:a16="http://schemas.microsoft.com/office/drawing/2014/main" id="{36F65CF8-A51D-4730-85CF-C40BE2704C74}"/>
               </a:ext>
             </a:extLst>
           </p:cNvPr>
@@ -3030,7 +3030,7 @@
           <p:cNvPr id="16" name="">
             <a:extLst xmlns:a="http://schemas.openxmlformats.org/drawingml/2006/main">
               <a:ext uri="{FF2B5EF4-FFF2-40B4-BE49-F238E27FC236}">
-                <a16:creationId xmlns:a16="http://schemas.microsoft.com/office/drawing/2014/main" id="{10F0B0A1-BA52-4038-B3FA-11C331DB7D12}"/>
+                <a16:creationId xmlns:a16="http://schemas.microsoft.com/office/drawing/2014/main" id="{C4EB072E-C10A-479C-B235-087F3660B29A}"/>
               </a:ext>
             </a:extLst>
           </p:cNvPr>
@@ -3088,7 +3088,7 @@
           <p:cNvPr id="17" name="">
             <a:extLst xmlns:a="http://schemas.openxmlformats.org/drawingml/2006/main">
               <a:ext uri="{FF2B5EF4-FFF2-40B4-BE49-F238E27FC236}">
-                <a16:creationId xmlns:a16="http://schemas.microsoft.com/office/drawing/2014/main" id="{F1ED2E02-9303-4AFA-872F-5D1EAAD50D5F}"/>
+                <a16:creationId xmlns:a16="http://schemas.microsoft.com/office/drawing/2014/main" id="{AA10F977-7003-457C-96D3-A72313C4EDF1}"/>
               </a:ext>
             </a:extLst>
           </p:cNvPr>
@@ -3180,7 +3180,7 @@
           <p:cNvPr id="18" name="">
             <a:extLst xmlns:a="http://schemas.openxmlformats.org/drawingml/2006/main">
               <a:ext uri="{FF2B5EF4-FFF2-40B4-BE49-F238E27FC236}">
-                <a16:creationId xmlns:a16="http://schemas.microsoft.com/office/drawing/2014/main" id="{87F1372B-9413-4A35-9206-715031F96378}"/>
+                <a16:creationId xmlns:a16="http://schemas.microsoft.com/office/drawing/2014/main" id="{32832E4F-26F0-48B6-8740-4C0E2E306C5F}"/>
               </a:ext>
             </a:extLst>
           </p:cNvPr>
@@ -3213,7 +3213,7 @@
           <p:cNvPr id="19" name="">
             <a:extLst xmlns:a="http://schemas.openxmlformats.org/drawingml/2006/main">
               <a:ext uri="{FF2B5EF4-FFF2-40B4-BE49-F238E27FC236}">
-                <a16:creationId xmlns:a16="http://schemas.microsoft.com/office/drawing/2014/main" id="{48223B15-3958-4641-9248-C19A9FFC4407}"/>
+                <a16:creationId xmlns:a16="http://schemas.microsoft.com/office/drawing/2014/main" id="{A47F4D51-FC5A-471D-8D62-D5DFB9A483DB}"/>
               </a:ext>
             </a:extLst>
           </p:cNvPr>
@@ -3248,7 +3248,7 @@
           <p:cNvPr id="20" name="">
             <a:extLst xmlns:a="http://schemas.openxmlformats.org/drawingml/2006/main">
               <a:ext uri="{FF2B5EF4-FFF2-40B4-BE49-F238E27FC236}">
-                <a16:creationId xmlns:a16="http://schemas.microsoft.com/office/drawing/2014/main" id="{876DBDA1-8EF5-4FEB-99CD-F023BFCFE1AD}"/>
+                <a16:creationId xmlns:a16="http://schemas.microsoft.com/office/drawing/2014/main" id="{B6C5057F-A9F1-4FC9-ABE0-AE45DCA81FFA}"/>
               </a:ext>
             </a:extLst>
           </p:cNvPr>
@@ -3306,7 +3306,7 @@
           <p:cNvPr id="21" name="">
             <a:extLst xmlns:a="http://schemas.openxmlformats.org/drawingml/2006/main">
               <a:ext uri="{FF2B5EF4-FFF2-40B4-BE49-F238E27FC236}">
-                <a16:creationId xmlns:a16="http://schemas.microsoft.com/office/drawing/2014/main" id="{99188005-474A-40DB-9447-6AA5AECE86A4}"/>
+                <a16:creationId xmlns:a16="http://schemas.microsoft.com/office/drawing/2014/main" id="{33A91DFC-591E-4BFF-A018-9F4E0F8333E9}"/>
               </a:ext>
             </a:extLst>
           </p:cNvPr>
@@ -3396,7 +3396,7 @@
     </p:spTree>
     <p:extLst>
       <p:ext uri="{BB962C8B-B14F-4D97-AF65-F5344CB8AC3E}">
-        <p14:creationId xmlns:p14="http://schemas.microsoft.com/office/powerpoint/2010/main" val="1089420729"/>
+        <p14:creationId xmlns:p14="http://schemas.microsoft.com/office/powerpoint/2010/main" val="105488398"/>
       </p:ext>
     </p:extLst>
   </p:cSld>
@@ -3409,7 +3409,7 @@
     <p:bg>
       <p:bgPr>
         <a:solidFill xmlns:a="http://schemas.openxmlformats.org/drawingml/2006/main">
-          <a:srgbClr val="0E1B3E"/>
+          <a:srgbClr val="070F26"/>
         </a:solidFill>
       </p:bgPr>
     </p:bg>
@@ -3427,7 +3427,7 @@
           <p:cNvPr id="1" name="">
             <a:extLst xmlns:a="http://schemas.openxmlformats.org/drawingml/2006/main">
               <a:ext uri="{FF2B5EF4-FFF2-40B4-BE49-F238E27FC236}">
-                <a16:creationId xmlns:a16="http://schemas.microsoft.com/office/drawing/2014/main" id="{815E5BB4-AE87-4C56-BAC0-1C7D7C34636B}"/>
+                <a16:creationId xmlns:a16="http://schemas.microsoft.com/office/drawing/2014/main" id="{BB8B4AA2-1C02-44A5-906C-E645D84E629D}"/>
               </a:ext>
             </a:extLst>
           </p:cNvPr>
@@ -3445,7 +3445,7 @@
             <a:avLst/>
           </a:prstGeom>
           <a:solidFill xmlns:a="http://schemas.openxmlformats.org/drawingml/2006/main">
-            <a:srgbClr val="0E1B3E"/>
+            <a:srgbClr val="070F26"/>
           </a:solidFill>
           <a:ln xmlns:a="http://schemas.openxmlformats.org/drawingml/2006/main" w="0">
             <a:solidFill>
@@ -3466,7 +3466,7 @@
           <p:nvPr/>
         </p:nvPicPr>
         <p:blipFill>
-          <a:blip xmlns:r="http://schemas.openxmlformats.org/officeDocument/2006/relationships" xmlns:a="http://schemas.openxmlformats.org/drawingml/2006/main" r:embed="R13dbdce810764806"/>
+          <a:blip xmlns:r="http://schemas.openxmlformats.org/officeDocument/2006/relationships" xmlns:a="http://schemas.openxmlformats.org/drawingml/2006/main" r:embed="R8aafd142182f4625"/>
           <a:stretch xmlns:a="http://schemas.openxmlformats.org/drawingml/2006/main"/>
         </p:blipFill>
         <p:spPr>
@@ -3484,7 +3484,7 @@
           <p:cNvPr id="3" name="">
             <a:extLst xmlns:a="http://schemas.openxmlformats.org/drawingml/2006/main">
               <a:ext uri="{FF2B5EF4-FFF2-40B4-BE49-F238E27FC236}">
-                <a16:creationId xmlns:a16="http://schemas.microsoft.com/office/drawing/2014/main" id="{CCD0D2CD-D73C-44AB-B613-7A7055B14C0A}"/>
+                <a16:creationId xmlns:a16="http://schemas.microsoft.com/office/drawing/2014/main" id="{6E7566DE-AD27-47D1-9E45-55085D21F77A}"/>
               </a:ext>
             </a:extLst>
           </p:cNvPr>
@@ -3542,7 +3542,7 @@
           <p:cNvPr id="4" name="">
             <a:extLst xmlns:a="http://schemas.openxmlformats.org/drawingml/2006/main">
               <a:ext uri="{FF2B5EF4-FFF2-40B4-BE49-F238E27FC236}">
-                <a16:creationId xmlns:a16="http://schemas.microsoft.com/office/drawing/2014/main" id="{7672F7D6-7E78-4B02-8D0D-D5DD03BD97C0}"/>
+                <a16:creationId xmlns:a16="http://schemas.microsoft.com/office/drawing/2014/main" id="{1AFB7065-CF14-4700-881C-FB1EFBEEEDFF}"/>
               </a:ext>
             </a:extLst>
           </p:cNvPr>
@@ -3600,7 +3600,7 @@
           <p:cNvPr id="5" name="">
             <a:extLst xmlns:a="http://schemas.openxmlformats.org/drawingml/2006/main">
               <a:ext uri="{FF2B5EF4-FFF2-40B4-BE49-F238E27FC236}">
-                <a16:creationId xmlns:a16="http://schemas.microsoft.com/office/drawing/2014/main" id="{BD8D6118-89F0-43EC-AF87-B62FE9319ACA}"/>
+                <a16:creationId xmlns:a16="http://schemas.microsoft.com/office/drawing/2014/main" id="{2FE1B63E-EBF6-478A-B645-E5FFA9338CE6}"/>
               </a:ext>
             </a:extLst>
           </p:cNvPr>
@@ -3658,7 +3658,7 @@
           <p:cNvPr id="6" name="">
             <a:extLst xmlns:a="http://schemas.openxmlformats.org/drawingml/2006/main">
               <a:ext uri="{FF2B5EF4-FFF2-40B4-BE49-F238E27FC236}">
-                <a16:creationId xmlns:a16="http://schemas.microsoft.com/office/drawing/2014/main" id="{AE49ED64-9288-4480-B755-0158AE0FC7D4}"/>
+                <a16:creationId xmlns:a16="http://schemas.microsoft.com/office/drawing/2014/main" id="{A7CAAB58-DEB9-4F44-9E03-2F0EA91FAA95}"/>
               </a:ext>
             </a:extLst>
           </p:cNvPr>
@@ -3720,13 +3720,13 @@
           <p:nvPr/>
         </p:nvPicPr>
         <p:blipFill>
-          <a:blip xmlns:r="http://schemas.openxmlformats.org/officeDocument/2006/relationships" xmlns:a="http://schemas.openxmlformats.org/drawingml/2006/main" r:embed="R4059f1f4a5b8472b"/>
+          <a:blip xmlns:r="http://schemas.openxmlformats.org/officeDocument/2006/relationships" xmlns:a="http://schemas.openxmlformats.org/drawingml/2006/main" r:embed="R1b961c40535e4ad0"/>
           <a:stretch xmlns:a="http://schemas.openxmlformats.org/drawingml/2006/main"/>
         </p:blipFill>
         <p:spPr>
           <a:xfrm xmlns:a="http://schemas.openxmlformats.org/drawingml/2006/main">
-            <a:off x="476250" y="1257300"/>
-            <a:ext cx="2667000" cy="4533900"/>
+            <a:off x="0" y="1746250"/>
+            <a:ext cx="2667000" cy="3556000"/>
           </a:xfrm>
           <a:prstGeom xmlns:a="http://schemas.openxmlformats.org/drawingml/2006/main" prst="rect">
             <a:avLst/>
@@ -3738,7 +3738,7 @@
           <p:cNvPr id="8" name="">
             <a:extLst xmlns:a="http://schemas.openxmlformats.org/drawingml/2006/main">
               <a:ext uri="{FF2B5EF4-FFF2-40B4-BE49-F238E27FC236}">
-                <a16:creationId xmlns:a16="http://schemas.microsoft.com/office/drawing/2014/main" id="{324627A9-FA0E-4F69-B958-2D7B2DBF935F}"/>
+                <a16:creationId xmlns:a16="http://schemas.microsoft.com/office/drawing/2014/main" id="{86968619-5EC7-4182-8A3A-C3803AE1F044}"/>
               </a:ext>
             </a:extLst>
           </p:cNvPr>
@@ -3796,7 +3796,7 @@
           <p:cNvPr id="9" name="">
             <a:extLst xmlns:a="http://schemas.openxmlformats.org/drawingml/2006/main">
               <a:ext uri="{FF2B5EF4-FFF2-40B4-BE49-F238E27FC236}">
-                <a16:creationId xmlns:a16="http://schemas.microsoft.com/office/drawing/2014/main" id="{59A15A3A-E915-4117-953A-24AFB89E5AD0}"/>
+                <a16:creationId xmlns:a16="http://schemas.microsoft.com/office/drawing/2014/main" id="{CBBE57A1-35E1-4016-B718-29703815E7DA}"/>
               </a:ext>
             </a:extLst>
           </p:cNvPr>
@@ -3854,7 +3854,7 @@
           <p:cNvPr id="10" name="">
             <a:extLst xmlns:a="http://schemas.openxmlformats.org/drawingml/2006/main">
               <a:ext uri="{FF2B5EF4-FFF2-40B4-BE49-F238E27FC236}">
-                <a16:creationId xmlns:a16="http://schemas.microsoft.com/office/drawing/2014/main" id="{11CA3402-34A1-4595-B4F3-826C7A7B38F3}"/>
+                <a16:creationId xmlns:a16="http://schemas.microsoft.com/office/drawing/2014/main" id="{DF62EAFA-8613-4534-A8C6-302F30B59866}"/>
               </a:ext>
             </a:extLst>
           </p:cNvPr>
@@ -3910,7 +3910,7 @@
     </p:spTree>
     <p:extLst>
       <p:ext uri="{BB962C8B-B14F-4D97-AF65-F5344CB8AC3E}">
-        <p14:creationId xmlns:p14="http://schemas.microsoft.com/office/powerpoint/2010/main" val="1273689627"/>
+        <p14:creationId xmlns:p14="http://schemas.microsoft.com/office/powerpoint/2010/main" val="889205664"/>
       </p:ext>
     </p:extLst>
   </p:cSld>
@@ -3941,7 +3941,7 @@
           <p:cNvPr id="1" name="">
             <a:extLst xmlns:a="http://schemas.openxmlformats.org/drawingml/2006/main">
               <a:ext uri="{FF2B5EF4-FFF2-40B4-BE49-F238E27FC236}">
-                <a16:creationId xmlns:a16="http://schemas.microsoft.com/office/drawing/2014/main" id="{DBE46048-6B43-49A8-9D91-12C394C585CD}"/>
+                <a16:creationId xmlns:a16="http://schemas.microsoft.com/office/drawing/2014/main" id="{4B03E712-E408-42BC-AAEF-23E3C2BF3C51}"/>
               </a:ext>
             </a:extLst>
           </p:cNvPr>
@@ -3980,7 +3980,7 @@
           <p:nvPr/>
         </p:nvPicPr>
         <p:blipFill>
-          <a:blip xmlns:r="http://schemas.openxmlformats.org/officeDocument/2006/relationships" xmlns:a="http://schemas.openxmlformats.org/drawingml/2006/main" r:embed="Reab55e6fc0fe42f3"/>
+          <a:blip xmlns:r="http://schemas.openxmlformats.org/officeDocument/2006/relationships" xmlns:a="http://schemas.openxmlformats.org/drawingml/2006/main" r:embed="Ra02283f7050b4555"/>
           <a:stretch xmlns:a="http://schemas.openxmlformats.org/drawingml/2006/main"/>
         </p:blipFill>
         <p:spPr>
@@ -3998,7 +3998,7 @@
           <p:cNvPr id="3" name="">
             <a:extLst xmlns:a="http://schemas.openxmlformats.org/drawingml/2006/main">
               <a:ext uri="{FF2B5EF4-FFF2-40B4-BE49-F238E27FC236}">
-                <a16:creationId xmlns:a16="http://schemas.microsoft.com/office/drawing/2014/main" id="{DD6A902D-17DA-42EC-8116-B47A0CDEB01C}"/>
+                <a16:creationId xmlns:a16="http://schemas.microsoft.com/office/drawing/2014/main" id="{43671B58-09B7-4C73-905B-36A75CE4B8A3}"/>
               </a:ext>
             </a:extLst>
           </p:cNvPr>
@@ -4036,14 +4036,14 @@
             <a:pPr algn="r">
               <a:defRPr sz="825" b="1">
                 <a:solidFill>
-                  <a:srgbClr val="0E1B3E"/>
+                  <a:srgbClr val="070F26"/>
                 </a:solidFill>
               </a:defRPr>
             </a:pPr>
             <a:r>
               <a:rPr sz="825" b="1">
                 <a:solidFill>
-                  <a:srgbClr val="0E1B3E"/>
+                  <a:srgbClr val="070F26"/>
                 </a:solidFill>
               </a:rPr>
               <a:t>NTT DATA UNIVERSITY</a:t>
@@ -4056,7 +4056,7 @@
           <p:cNvPr id="4" name="">
             <a:extLst xmlns:a="http://schemas.openxmlformats.org/drawingml/2006/main">
               <a:ext uri="{FF2B5EF4-FFF2-40B4-BE49-F238E27FC236}">
-                <a16:creationId xmlns:a16="http://schemas.microsoft.com/office/drawing/2014/main" id="{2E65FDC4-5B83-4D9C-A079-0C5D075591EC}"/>
+                <a16:creationId xmlns:a16="http://schemas.microsoft.com/office/drawing/2014/main" id="{96D54D78-3751-4652-96F3-84038D37F9AB}"/>
               </a:ext>
             </a:extLst>
           </p:cNvPr>
@@ -4114,7 +4114,7 @@
           <p:cNvPr id="5" name="">
             <a:extLst xmlns:a="http://schemas.openxmlformats.org/drawingml/2006/main">
               <a:ext uri="{FF2B5EF4-FFF2-40B4-BE49-F238E27FC236}">
-                <a16:creationId xmlns:a16="http://schemas.microsoft.com/office/drawing/2014/main" id="{42375209-C3E7-404D-A788-66AA2C531A06}"/>
+                <a16:creationId xmlns:a16="http://schemas.microsoft.com/office/drawing/2014/main" id="{F15484B2-EC6C-4D3A-BE60-C43F16EBFE96}"/>
               </a:ext>
             </a:extLst>
           </p:cNvPr>
@@ -4172,7 +4172,7 @@
           <p:cNvPr id="6" name="">
             <a:extLst xmlns:a="http://schemas.openxmlformats.org/drawingml/2006/main">
               <a:ext uri="{FF2B5EF4-FFF2-40B4-BE49-F238E27FC236}">
-                <a16:creationId xmlns:a16="http://schemas.microsoft.com/office/drawing/2014/main" id="{FB76A390-43C1-468B-9795-C9C75AF5DFA6}"/>
+                <a16:creationId xmlns:a16="http://schemas.microsoft.com/office/drawing/2014/main" id="{9C5CA686-3A05-45A4-B978-6868D95FAEA2}"/>
               </a:ext>
             </a:extLst>
           </p:cNvPr>
@@ -4210,14 +4210,14 @@
             <a:pPr algn="r">
               <a:defRPr sz="675" b="1">
                 <a:solidFill>
-                  <a:srgbClr val="0E1B3E"/>
+                  <a:srgbClr val="070F26"/>
                 </a:solidFill>
               </a:defRPr>
             </a:pPr>
             <a:r>
               <a:rPr sz="675" b="1">
                 <a:solidFill>
-                  <a:srgbClr val="0E1B3E"/>
+                  <a:srgbClr val="070F26"/>
                 </a:solidFill>
               </a:rPr>
               <a:t>NTT DATA UNIVERSITY</a:t>
@@ -4230,7 +4230,7 @@
           <p:cNvPr id="7" name="">
             <a:extLst xmlns:a="http://schemas.openxmlformats.org/drawingml/2006/main">
               <a:ext uri="{FF2B5EF4-FFF2-40B4-BE49-F238E27FC236}">
-                <a16:creationId xmlns:a16="http://schemas.microsoft.com/office/drawing/2014/main" id="{363CBA9F-92A8-420D-8FD6-E2E874558279}"/>
+                <a16:creationId xmlns:a16="http://schemas.microsoft.com/office/drawing/2014/main" id="{6D1B3C7F-EB0B-4F6E-9298-2C03808E2AE8}"/>
               </a:ext>
             </a:extLst>
           </p:cNvPr>
@@ -4288,7 +4288,7 @@
           <p:cNvPr id="8" name="">
             <a:extLst xmlns:a="http://schemas.openxmlformats.org/drawingml/2006/main">
               <a:ext uri="{FF2B5EF4-FFF2-40B4-BE49-F238E27FC236}">
-                <a16:creationId xmlns:a16="http://schemas.microsoft.com/office/drawing/2014/main" id="{8B6FE64B-F857-43ED-BB95-85BDC514B54B}"/>
+                <a16:creationId xmlns:a16="http://schemas.microsoft.com/office/drawing/2014/main" id="{E9811489-01DA-4B13-853D-00B4A952AA57}"/>
               </a:ext>
             </a:extLst>
           </p:cNvPr>
@@ -4326,14 +4326,14 @@
             <a:pPr algn="l">
               <a:defRPr sz="2400" b="0">
                 <a:solidFill>
-                  <a:srgbClr val="0E1B3E"/>
+                  <a:srgbClr val="070F26"/>
                 </a:solidFill>
               </a:defRPr>
             </a:pPr>
             <a:r>
               <a:rPr sz="2400" b="0">
                 <a:solidFill>
-                  <a:srgbClr val="0E1B3E"/>
+                  <a:srgbClr val="070F26"/>
                 </a:solidFill>
               </a:rPr>
               <a:t>O que o aluno é capaz de fazer agora</a:t>
@@ -4346,7 +4346,7 @@
           <p:cNvPr id="9" name="">
             <a:extLst xmlns:a="http://schemas.openxmlformats.org/drawingml/2006/main">
               <a:ext uri="{FF2B5EF4-FFF2-40B4-BE49-F238E27FC236}">
-                <a16:creationId xmlns:a16="http://schemas.microsoft.com/office/drawing/2014/main" id="{0D98DB8B-D00C-4A5E-9F0F-3C98B9D4B31C}"/>
+                <a16:creationId xmlns:a16="http://schemas.microsoft.com/office/drawing/2014/main" id="{997A02D0-3416-4D4B-A265-D51C9844CEAE}"/>
               </a:ext>
             </a:extLst>
           </p:cNvPr>
@@ -4404,7 +4404,7 @@
           <p:cNvPr id="10" name="">
             <a:extLst xmlns:a="http://schemas.openxmlformats.org/drawingml/2006/main">
               <a:ext uri="{FF2B5EF4-FFF2-40B4-BE49-F238E27FC236}">
-                <a16:creationId xmlns:a16="http://schemas.microsoft.com/office/drawing/2014/main" id="{324FF1DF-BB5B-4B6A-BB73-146298D4BD2E}"/>
+                <a16:creationId xmlns:a16="http://schemas.microsoft.com/office/drawing/2014/main" id="{E459E18B-C226-4173-8C81-60C656F50790}"/>
               </a:ext>
             </a:extLst>
           </p:cNvPr>
@@ -4437,7 +4437,7 @@
           <p:cNvPr id="11" name="">
             <a:extLst xmlns:a="http://schemas.openxmlformats.org/drawingml/2006/main">
               <a:ext uri="{FF2B5EF4-FFF2-40B4-BE49-F238E27FC236}">
-                <a16:creationId xmlns:a16="http://schemas.microsoft.com/office/drawing/2014/main" id="{9C2BEBC5-F456-43FE-8FAD-6A40DAA5E98B}"/>
+                <a16:creationId xmlns:a16="http://schemas.microsoft.com/office/drawing/2014/main" id="{718B33DC-9986-4177-840B-9C42410D77D3}"/>
               </a:ext>
             </a:extLst>
           </p:cNvPr>
@@ -4472,7 +4472,7 @@
           <p:cNvPr id="12" name="">
             <a:extLst xmlns:a="http://schemas.openxmlformats.org/drawingml/2006/main">
               <a:ext uri="{FF2B5EF4-FFF2-40B4-BE49-F238E27FC236}">
-                <a16:creationId xmlns:a16="http://schemas.microsoft.com/office/drawing/2014/main" id="{A8DE3B00-D5CA-46F7-915F-56E820A8EA00}"/>
+                <a16:creationId xmlns:a16="http://schemas.microsoft.com/office/drawing/2014/main" id="{688FA53E-9E33-4F64-847B-110096019684}"/>
               </a:ext>
             </a:extLst>
           </p:cNvPr>
@@ -4530,7 +4530,7 @@
           <p:cNvPr id="13" name="">
             <a:extLst xmlns:a="http://schemas.openxmlformats.org/drawingml/2006/main">
               <a:ext uri="{FF2B5EF4-FFF2-40B4-BE49-F238E27FC236}">
-                <a16:creationId xmlns:a16="http://schemas.microsoft.com/office/drawing/2014/main" id="{65E8857A-90A7-407F-B1FE-4BEFC5C0E25F}"/>
+                <a16:creationId xmlns:a16="http://schemas.microsoft.com/office/drawing/2014/main" id="{48A8DDC6-EF5A-495F-B8AE-6B46CE0BFF7A}"/>
               </a:ext>
             </a:extLst>
           </p:cNvPr>
@@ -4605,7 +4605,7 @@
           <p:cNvPr id="14" name="">
             <a:extLst xmlns:a="http://schemas.openxmlformats.org/drawingml/2006/main">
               <a:ext uri="{FF2B5EF4-FFF2-40B4-BE49-F238E27FC236}">
-                <a16:creationId xmlns:a16="http://schemas.microsoft.com/office/drawing/2014/main" id="{697F4066-5FD2-4BA0-8AA7-5DD7F4C9A6CB}"/>
+                <a16:creationId xmlns:a16="http://schemas.microsoft.com/office/drawing/2014/main" id="{76CA29FA-C018-4E26-926D-38E0F70369D7}"/>
               </a:ext>
             </a:extLst>
           </p:cNvPr>
@@ -4638,7 +4638,7 @@
           <p:cNvPr id="15" name="">
             <a:extLst xmlns:a="http://schemas.openxmlformats.org/drawingml/2006/main">
               <a:ext uri="{FF2B5EF4-FFF2-40B4-BE49-F238E27FC236}">
-                <a16:creationId xmlns:a16="http://schemas.microsoft.com/office/drawing/2014/main" id="{E9E28616-F9D6-4E79-BAA4-2FF19D464B88}"/>
+                <a16:creationId xmlns:a16="http://schemas.microsoft.com/office/drawing/2014/main" id="{EAD04A3A-D080-4B62-9701-5AB7760F3DC0}"/>
               </a:ext>
             </a:extLst>
           </p:cNvPr>
@@ -4673,7 +4673,7 @@
           <p:cNvPr id="16" name="">
             <a:extLst xmlns:a="http://schemas.openxmlformats.org/drawingml/2006/main">
               <a:ext uri="{FF2B5EF4-FFF2-40B4-BE49-F238E27FC236}">
-                <a16:creationId xmlns:a16="http://schemas.microsoft.com/office/drawing/2014/main" id="{8DD718AB-2483-42C7-8DCD-49C84751FE16}"/>
+                <a16:creationId xmlns:a16="http://schemas.microsoft.com/office/drawing/2014/main" id="{563CE75E-B540-4278-98E8-B3A95B6EA8C3}"/>
               </a:ext>
             </a:extLst>
           </p:cNvPr>
@@ -4731,7 +4731,7 @@
           <p:cNvPr id="17" name="">
             <a:extLst xmlns:a="http://schemas.openxmlformats.org/drawingml/2006/main">
               <a:ext uri="{FF2B5EF4-FFF2-40B4-BE49-F238E27FC236}">
-                <a16:creationId xmlns:a16="http://schemas.microsoft.com/office/drawing/2014/main" id="{A0B0875B-EF5E-4434-B98F-68E96A680EF8}"/>
+                <a16:creationId xmlns:a16="http://schemas.microsoft.com/office/drawing/2014/main" id="{F546E232-98AE-483D-B20E-78C836C5984A}"/>
               </a:ext>
             </a:extLst>
           </p:cNvPr>
@@ -4806,7 +4806,7 @@
           <p:cNvPr id="18" name="">
             <a:extLst xmlns:a="http://schemas.openxmlformats.org/drawingml/2006/main">
               <a:ext uri="{FF2B5EF4-FFF2-40B4-BE49-F238E27FC236}">
-                <a16:creationId xmlns:a16="http://schemas.microsoft.com/office/drawing/2014/main" id="{47E83F71-ECB1-43BB-8015-EA84340DEEFB}"/>
+                <a16:creationId xmlns:a16="http://schemas.microsoft.com/office/drawing/2014/main" id="{2F6071CB-D0D8-4EE5-B3E4-D129534C52AA}"/>
               </a:ext>
             </a:extLst>
           </p:cNvPr>
@@ -4839,7 +4839,7 @@
           <p:cNvPr id="19" name="">
             <a:extLst xmlns:a="http://schemas.openxmlformats.org/drawingml/2006/main">
               <a:ext uri="{FF2B5EF4-FFF2-40B4-BE49-F238E27FC236}">
-                <a16:creationId xmlns:a16="http://schemas.microsoft.com/office/drawing/2014/main" id="{B7D6600E-80AF-4828-BCC6-045071D43D9C}"/>
+                <a16:creationId xmlns:a16="http://schemas.microsoft.com/office/drawing/2014/main" id="{F09DE151-6472-4277-8683-CA8BCCDFD0FE}"/>
               </a:ext>
             </a:extLst>
           </p:cNvPr>
@@ -4874,7 +4874,7 @@
           <p:cNvPr id="20" name="">
             <a:extLst xmlns:a="http://schemas.openxmlformats.org/drawingml/2006/main">
               <a:ext uri="{FF2B5EF4-FFF2-40B4-BE49-F238E27FC236}">
-                <a16:creationId xmlns:a16="http://schemas.microsoft.com/office/drawing/2014/main" id="{374548F5-128B-44CD-98DF-89DEE1FC2C2B}"/>
+                <a16:creationId xmlns:a16="http://schemas.microsoft.com/office/drawing/2014/main" id="{45A4F7CC-89A0-4D83-9F29-C4EC643C4E21}"/>
               </a:ext>
             </a:extLst>
           </p:cNvPr>
@@ -4932,7 +4932,7 @@
           <p:cNvPr id="21" name="">
             <a:extLst xmlns:a="http://schemas.openxmlformats.org/drawingml/2006/main">
               <a:ext uri="{FF2B5EF4-FFF2-40B4-BE49-F238E27FC236}">
-                <a16:creationId xmlns:a16="http://schemas.microsoft.com/office/drawing/2014/main" id="{342DC268-D49D-40D5-9D8E-DC8BE956C9ED}"/>
+                <a16:creationId xmlns:a16="http://schemas.microsoft.com/office/drawing/2014/main" id="{21FEA82D-521B-4EAF-9801-9D2CB01498F8}"/>
               </a:ext>
             </a:extLst>
           </p:cNvPr>
@@ -5007,7 +5007,7 @@
           <p:cNvPr id="22" name="">
             <a:extLst xmlns:a="http://schemas.openxmlformats.org/drawingml/2006/main">
               <a:ext uri="{FF2B5EF4-FFF2-40B4-BE49-F238E27FC236}">
-                <a16:creationId xmlns:a16="http://schemas.microsoft.com/office/drawing/2014/main" id="{7AFD8637-221A-4A25-8880-8CCD71D8853D}"/>
+                <a16:creationId xmlns:a16="http://schemas.microsoft.com/office/drawing/2014/main" id="{DC693585-9E4A-4905-9AD0-3F384C0F1F72}"/>
               </a:ext>
             </a:extLst>
           </p:cNvPr>
@@ -5040,7 +5040,7 @@
           <p:cNvPr id="23" name="">
             <a:extLst xmlns:a="http://schemas.openxmlformats.org/drawingml/2006/main">
               <a:ext uri="{FF2B5EF4-FFF2-40B4-BE49-F238E27FC236}">
-                <a16:creationId xmlns:a16="http://schemas.microsoft.com/office/drawing/2014/main" id="{65B7D923-93CF-4ABE-A6E3-F2B1A26E3D10}"/>
+                <a16:creationId xmlns:a16="http://schemas.microsoft.com/office/drawing/2014/main" id="{65DEF1C0-E1BE-466B-B04C-F0302CF93E3E}"/>
               </a:ext>
             </a:extLst>
           </p:cNvPr>
@@ -5075,7 +5075,7 @@
           <p:cNvPr id="24" name="">
             <a:extLst xmlns:a="http://schemas.openxmlformats.org/drawingml/2006/main">
               <a:ext uri="{FF2B5EF4-FFF2-40B4-BE49-F238E27FC236}">
-                <a16:creationId xmlns:a16="http://schemas.microsoft.com/office/drawing/2014/main" id="{14A2E079-C976-47AA-9D6C-4FD766B09A53}"/>
+                <a16:creationId xmlns:a16="http://schemas.microsoft.com/office/drawing/2014/main" id="{1C250C1D-75C6-465F-BA7B-3D5C27ACCC63}"/>
               </a:ext>
             </a:extLst>
           </p:cNvPr>
@@ -5133,7 +5133,7 @@
           <p:cNvPr id="25" name="">
             <a:extLst xmlns:a="http://schemas.openxmlformats.org/drawingml/2006/main">
               <a:ext uri="{FF2B5EF4-FFF2-40B4-BE49-F238E27FC236}">
-                <a16:creationId xmlns:a16="http://schemas.microsoft.com/office/drawing/2014/main" id="{AEC2F52E-86CD-41B6-80D7-F0424AC751AA}"/>
+                <a16:creationId xmlns:a16="http://schemas.microsoft.com/office/drawing/2014/main" id="{5B7E9834-1015-4CB8-9819-19EE5035D108}"/>
               </a:ext>
             </a:extLst>
           </p:cNvPr>
@@ -5206,7 +5206,7 @@
     </p:spTree>
     <p:extLst>
       <p:ext uri="{BB962C8B-B14F-4D97-AF65-F5344CB8AC3E}">
-        <p14:creationId xmlns:p14="http://schemas.microsoft.com/office/powerpoint/2010/main" val="583287635"/>
+        <p14:creationId xmlns:p14="http://schemas.microsoft.com/office/powerpoint/2010/main" val="1591740122"/>
       </p:ext>
     </p:extLst>
   </p:cSld>
@@ -5237,7 +5237,7 @@
           <p:cNvPr id="1" name="">
             <a:extLst xmlns:a="http://schemas.openxmlformats.org/drawingml/2006/main">
               <a:ext uri="{FF2B5EF4-FFF2-40B4-BE49-F238E27FC236}">
-                <a16:creationId xmlns:a16="http://schemas.microsoft.com/office/drawing/2014/main" id="{1F24A7C4-DAD1-41B4-B574-6ED9CF0F33F4}"/>
+                <a16:creationId xmlns:a16="http://schemas.microsoft.com/office/drawing/2014/main" id="{D7611D13-054E-42FD-8008-8D6B97E572FA}"/>
               </a:ext>
             </a:extLst>
           </p:cNvPr>
@@ -5276,7 +5276,7 @@
           <p:nvPr/>
         </p:nvPicPr>
         <p:blipFill>
-          <a:blip xmlns:r="http://schemas.openxmlformats.org/officeDocument/2006/relationships" xmlns:a="http://schemas.openxmlformats.org/drawingml/2006/main" r:embed="Rd9c4988212cf4d14"/>
+          <a:blip xmlns:r="http://schemas.openxmlformats.org/officeDocument/2006/relationships" xmlns:a="http://schemas.openxmlformats.org/drawingml/2006/main" r:embed="R49fe11259bde4edd"/>
           <a:stretch xmlns:a="http://schemas.openxmlformats.org/drawingml/2006/main"/>
         </p:blipFill>
         <p:spPr>
@@ -5294,7 +5294,7 @@
           <p:cNvPr id="3" name="">
             <a:extLst xmlns:a="http://schemas.openxmlformats.org/drawingml/2006/main">
               <a:ext uri="{FF2B5EF4-FFF2-40B4-BE49-F238E27FC236}">
-                <a16:creationId xmlns:a16="http://schemas.microsoft.com/office/drawing/2014/main" id="{2EF80C2A-9D56-4397-8D7B-D5015CF40282}"/>
+                <a16:creationId xmlns:a16="http://schemas.microsoft.com/office/drawing/2014/main" id="{542C9209-5D9B-4A9C-84F8-07C4917A7DFE}"/>
               </a:ext>
             </a:extLst>
           </p:cNvPr>
@@ -5332,14 +5332,14 @@
             <a:pPr algn="r">
               <a:defRPr sz="825" b="1">
                 <a:solidFill>
-                  <a:srgbClr val="0E1B3E"/>
+                  <a:srgbClr val="070F26"/>
                 </a:solidFill>
               </a:defRPr>
             </a:pPr>
             <a:r>
               <a:rPr sz="825" b="1">
                 <a:solidFill>
-                  <a:srgbClr val="0E1B3E"/>
+                  <a:srgbClr val="070F26"/>
                 </a:solidFill>
               </a:rPr>
               <a:t>NTT DATA UNIVERSITY</a:t>
@@ -5352,7 +5352,7 @@
           <p:cNvPr id="4" name="">
             <a:extLst xmlns:a="http://schemas.openxmlformats.org/drawingml/2006/main">
               <a:ext uri="{FF2B5EF4-FFF2-40B4-BE49-F238E27FC236}">
-                <a16:creationId xmlns:a16="http://schemas.microsoft.com/office/drawing/2014/main" id="{07752F8F-645A-427D-8C17-44E36BDDC1C7}"/>
+                <a16:creationId xmlns:a16="http://schemas.microsoft.com/office/drawing/2014/main" id="{23BA755F-A3E3-4076-839A-0415DD214E95}"/>
               </a:ext>
             </a:extLst>
           </p:cNvPr>
@@ -5410,7 +5410,7 @@
           <p:cNvPr id="5" name="">
             <a:extLst xmlns:a="http://schemas.openxmlformats.org/drawingml/2006/main">
               <a:ext uri="{FF2B5EF4-FFF2-40B4-BE49-F238E27FC236}">
-                <a16:creationId xmlns:a16="http://schemas.microsoft.com/office/drawing/2014/main" id="{FCEA6D3F-6A2A-4CB2-8215-D9AB16734F9F}"/>
+                <a16:creationId xmlns:a16="http://schemas.microsoft.com/office/drawing/2014/main" id="{98E7924D-6780-4936-A942-4ECAC429A3DF}"/>
               </a:ext>
             </a:extLst>
           </p:cNvPr>
@@ -5468,7 +5468,7 @@
           <p:cNvPr id="6" name="">
             <a:extLst xmlns:a="http://schemas.openxmlformats.org/drawingml/2006/main">
               <a:ext uri="{FF2B5EF4-FFF2-40B4-BE49-F238E27FC236}">
-                <a16:creationId xmlns:a16="http://schemas.microsoft.com/office/drawing/2014/main" id="{C9DD5C08-C999-48CC-AEA2-C9B8EAB9B5CE}"/>
+                <a16:creationId xmlns:a16="http://schemas.microsoft.com/office/drawing/2014/main" id="{2C532D49-DDDD-4C41-A9B5-4B6FE3E495C2}"/>
               </a:ext>
             </a:extLst>
           </p:cNvPr>
@@ -5506,14 +5506,14 @@
             <a:pPr algn="r">
               <a:defRPr sz="675" b="1">
                 <a:solidFill>
-                  <a:srgbClr val="0E1B3E"/>
+                  <a:srgbClr val="070F26"/>
                 </a:solidFill>
               </a:defRPr>
             </a:pPr>
             <a:r>
               <a:rPr sz="675" b="1">
                 <a:solidFill>
-                  <a:srgbClr val="0E1B3E"/>
+                  <a:srgbClr val="070F26"/>
                 </a:solidFill>
               </a:rPr>
               <a:t>NTT DATA UNIVERSITY</a:t>
@@ -5526,7 +5526,7 @@
           <p:cNvPr id="7" name="">
             <a:extLst xmlns:a="http://schemas.openxmlformats.org/drawingml/2006/main">
               <a:ext uri="{FF2B5EF4-FFF2-40B4-BE49-F238E27FC236}">
-                <a16:creationId xmlns:a16="http://schemas.microsoft.com/office/drawing/2014/main" id="{EDA7CA08-23AD-4485-B0CC-B9AA7AAFDCE7}"/>
+                <a16:creationId xmlns:a16="http://schemas.microsoft.com/office/drawing/2014/main" id="{B2523706-87AF-4388-B7A6-CB7A80793803}"/>
               </a:ext>
             </a:extLst>
           </p:cNvPr>
@@ -5584,7 +5584,7 @@
           <p:cNvPr id="8" name="">
             <a:extLst xmlns:a="http://schemas.openxmlformats.org/drawingml/2006/main">
               <a:ext uri="{FF2B5EF4-FFF2-40B4-BE49-F238E27FC236}">
-                <a16:creationId xmlns:a16="http://schemas.microsoft.com/office/drawing/2014/main" id="{2E6F7BB4-203A-437F-866A-7A9FD1E4AE2E}"/>
+                <a16:creationId xmlns:a16="http://schemas.microsoft.com/office/drawing/2014/main" id="{A7D68986-D547-425B-ACA1-A7175A0EB0BF}"/>
               </a:ext>
             </a:extLst>
           </p:cNvPr>
@@ -5622,14 +5622,14 @@
             <a:pPr algn="l">
               <a:defRPr sz="2400" b="0">
                 <a:solidFill>
-                  <a:srgbClr val="0E1B3E"/>
+                  <a:srgbClr val="070F26"/>
                 </a:solidFill>
               </a:defRPr>
             </a:pPr>
             <a:r>
               <a:rPr sz="2400" b="0">
                 <a:solidFill>
-                  <a:srgbClr val="0E1B3E"/>
+                  <a:srgbClr val="070F26"/>
                 </a:solidFill>
               </a:rPr>
               <a:t>Módulo 5 — Lógica de ETL/ELT</a:t>
@@ -5642,7 +5642,7 @@
           <p:cNvPr id="9" name="">
             <a:extLst xmlns:a="http://schemas.openxmlformats.org/drawingml/2006/main">
               <a:ext uri="{FF2B5EF4-FFF2-40B4-BE49-F238E27FC236}">
-                <a16:creationId xmlns:a16="http://schemas.microsoft.com/office/drawing/2014/main" id="{42F3118F-16D4-4764-9320-1C04044D6860}"/>
+                <a16:creationId xmlns:a16="http://schemas.microsoft.com/office/drawing/2014/main" id="{40F256E2-F31B-4F4A-86C1-DC35901BBC78}"/>
               </a:ext>
             </a:extLst>
           </p:cNvPr>
@@ -5700,7 +5700,7 @@
           <p:cNvPr id="10" name="">
             <a:extLst xmlns:a="http://schemas.openxmlformats.org/drawingml/2006/main">
               <a:ext uri="{FF2B5EF4-FFF2-40B4-BE49-F238E27FC236}">
-                <a16:creationId xmlns:a16="http://schemas.microsoft.com/office/drawing/2014/main" id="{7BC6D793-B6F4-4221-8249-24D193561257}"/>
+                <a16:creationId xmlns:a16="http://schemas.microsoft.com/office/drawing/2014/main" id="{50E08BD6-1BE6-4D88-90E3-E85E5D96E29D}"/>
               </a:ext>
             </a:extLst>
           </p:cNvPr>
@@ -5733,7 +5733,7 @@
           <p:cNvPr id="11" name="">
             <a:extLst xmlns:a="http://schemas.openxmlformats.org/drawingml/2006/main">
               <a:ext uri="{FF2B5EF4-FFF2-40B4-BE49-F238E27FC236}">
-                <a16:creationId xmlns:a16="http://schemas.microsoft.com/office/drawing/2014/main" id="{285D87C8-FB76-4455-9D74-7232B31AF413}"/>
+                <a16:creationId xmlns:a16="http://schemas.microsoft.com/office/drawing/2014/main" id="{FF78D19B-8A98-427F-818D-BB56054AD7DD}"/>
               </a:ext>
             </a:extLst>
           </p:cNvPr>
@@ -5768,7 +5768,7 @@
           <p:cNvPr id="12" name="">
             <a:extLst xmlns:a="http://schemas.openxmlformats.org/drawingml/2006/main">
               <a:ext uri="{FF2B5EF4-FFF2-40B4-BE49-F238E27FC236}">
-                <a16:creationId xmlns:a16="http://schemas.microsoft.com/office/drawing/2014/main" id="{C5902F07-A713-429C-919D-00860EC01A9F}"/>
+                <a16:creationId xmlns:a16="http://schemas.microsoft.com/office/drawing/2014/main" id="{721C24FE-6EBB-43EE-8B9D-0103256085AE}"/>
               </a:ext>
             </a:extLst>
           </p:cNvPr>
@@ -5826,7 +5826,7 @@
           <p:cNvPr id="13" name="">
             <a:extLst xmlns:a="http://schemas.openxmlformats.org/drawingml/2006/main">
               <a:ext uri="{FF2B5EF4-FFF2-40B4-BE49-F238E27FC236}">
-                <a16:creationId xmlns:a16="http://schemas.microsoft.com/office/drawing/2014/main" id="{AF56E547-0B5D-4093-A8FE-154FC3C64C30}"/>
+                <a16:creationId xmlns:a16="http://schemas.microsoft.com/office/drawing/2014/main" id="{6CE43148-0C5B-47BA-A8B3-DC0F5BD97178}"/>
               </a:ext>
             </a:extLst>
           </p:cNvPr>
@@ -5918,7 +5918,7 @@
           <p:cNvPr id="14" name="">
             <a:extLst xmlns:a="http://schemas.openxmlformats.org/drawingml/2006/main">
               <a:ext uri="{FF2B5EF4-FFF2-40B4-BE49-F238E27FC236}">
-                <a16:creationId xmlns:a16="http://schemas.microsoft.com/office/drawing/2014/main" id="{E7AFD019-E09F-48FE-994E-AE96D53AA3D5}"/>
+                <a16:creationId xmlns:a16="http://schemas.microsoft.com/office/drawing/2014/main" id="{D3A3FB28-E1BE-4E3F-BF06-C59E55F0BCEE}"/>
               </a:ext>
             </a:extLst>
           </p:cNvPr>
@@ -5951,7 +5951,7 @@
           <p:cNvPr id="15" name="">
             <a:extLst xmlns:a="http://schemas.openxmlformats.org/drawingml/2006/main">
               <a:ext uri="{FF2B5EF4-FFF2-40B4-BE49-F238E27FC236}">
-                <a16:creationId xmlns:a16="http://schemas.microsoft.com/office/drawing/2014/main" id="{F389FC5F-9D94-4F48-A9DC-B5C6BD21B88D}"/>
+                <a16:creationId xmlns:a16="http://schemas.microsoft.com/office/drawing/2014/main" id="{D3C58855-77ED-4711-A26D-5AF0C8AFA894}"/>
               </a:ext>
             </a:extLst>
           </p:cNvPr>
@@ -5986,7 +5986,7 @@
           <p:cNvPr id="16" name="">
             <a:extLst xmlns:a="http://schemas.openxmlformats.org/drawingml/2006/main">
               <a:ext uri="{FF2B5EF4-FFF2-40B4-BE49-F238E27FC236}">
-                <a16:creationId xmlns:a16="http://schemas.microsoft.com/office/drawing/2014/main" id="{FA40F432-83D2-4362-9B43-ADEF275AA650}"/>
+                <a16:creationId xmlns:a16="http://schemas.microsoft.com/office/drawing/2014/main" id="{76D285F5-5034-4457-BD6D-EE26AD65A7B5}"/>
               </a:ext>
             </a:extLst>
           </p:cNvPr>
@@ -6044,7 +6044,7 @@
           <p:cNvPr id="17" name="">
             <a:extLst xmlns:a="http://schemas.openxmlformats.org/drawingml/2006/main">
               <a:ext uri="{FF2B5EF4-FFF2-40B4-BE49-F238E27FC236}">
-                <a16:creationId xmlns:a16="http://schemas.microsoft.com/office/drawing/2014/main" id="{5A35594F-A4D1-4EC6-9090-310D3A4D235B}"/>
+                <a16:creationId xmlns:a16="http://schemas.microsoft.com/office/drawing/2014/main" id="{8A17B69C-3A5E-468D-9234-13BEBE2DEBC6}"/>
               </a:ext>
             </a:extLst>
           </p:cNvPr>
@@ -6136,7 +6136,7 @@
           <p:cNvPr id="18" name="">
             <a:extLst xmlns:a="http://schemas.openxmlformats.org/drawingml/2006/main">
               <a:ext uri="{FF2B5EF4-FFF2-40B4-BE49-F238E27FC236}">
-                <a16:creationId xmlns:a16="http://schemas.microsoft.com/office/drawing/2014/main" id="{80AB39DE-E40B-4948-BAD8-C24E47EA9E5E}"/>
+                <a16:creationId xmlns:a16="http://schemas.microsoft.com/office/drawing/2014/main" id="{9459D8FC-4E21-46B5-AF42-76982083B7C7}"/>
               </a:ext>
             </a:extLst>
           </p:cNvPr>
@@ -6169,7 +6169,7 @@
           <p:cNvPr id="19" name="">
             <a:extLst xmlns:a="http://schemas.openxmlformats.org/drawingml/2006/main">
               <a:ext uri="{FF2B5EF4-FFF2-40B4-BE49-F238E27FC236}">
-                <a16:creationId xmlns:a16="http://schemas.microsoft.com/office/drawing/2014/main" id="{0F221609-B9DB-4E60-BC60-66A6BFDB5625}"/>
+                <a16:creationId xmlns:a16="http://schemas.microsoft.com/office/drawing/2014/main" id="{0039F2B1-4CDC-4083-9399-FB5A86CB3EAA}"/>
               </a:ext>
             </a:extLst>
           </p:cNvPr>
@@ -6204,7 +6204,7 @@
           <p:cNvPr id="20" name="">
             <a:extLst xmlns:a="http://schemas.openxmlformats.org/drawingml/2006/main">
               <a:ext uri="{FF2B5EF4-FFF2-40B4-BE49-F238E27FC236}">
-                <a16:creationId xmlns:a16="http://schemas.microsoft.com/office/drawing/2014/main" id="{2D565957-CCD9-4020-9970-9BBF2FB42BFB}"/>
+                <a16:creationId xmlns:a16="http://schemas.microsoft.com/office/drawing/2014/main" id="{87C20B88-A3C4-4B88-8397-E978BDDA1681}"/>
               </a:ext>
             </a:extLst>
           </p:cNvPr>
@@ -6262,7 +6262,7 @@
           <p:cNvPr id="21" name="">
             <a:extLst xmlns:a="http://schemas.openxmlformats.org/drawingml/2006/main">
               <a:ext uri="{FF2B5EF4-FFF2-40B4-BE49-F238E27FC236}">
-                <a16:creationId xmlns:a16="http://schemas.microsoft.com/office/drawing/2014/main" id="{B5A99BE4-7E2B-4652-A64F-836BA0E2D88C}"/>
+                <a16:creationId xmlns:a16="http://schemas.microsoft.com/office/drawing/2014/main" id="{0D6B9E73-FD2F-4622-825B-AF65ADE045FE}"/>
               </a:ext>
             </a:extLst>
           </p:cNvPr>
@@ -6352,7 +6352,7 @@
     </p:spTree>
     <p:extLst>
       <p:ext uri="{BB962C8B-B14F-4D97-AF65-F5344CB8AC3E}">
-        <p14:creationId xmlns:p14="http://schemas.microsoft.com/office/powerpoint/2010/main" val="2130104878"/>
+        <p14:creationId xmlns:p14="http://schemas.microsoft.com/office/powerpoint/2010/main" val="2136827432"/>
       </p:ext>
     </p:extLst>
   </p:cSld>
@@ -6365,7 +6365,7 @@
     <p:bg>
       <p:bgPr>
         <a:solidFill xmlns:a="http://schemas.openxmlformats.org/drawingml/2006/main">
-          <a:srgbClr val="0E1B3E"/>
+          <a:srgbClr val="070F26"/>
         </a:solidFill>
       </p:bgPr>
     </p:bg>
@@ -6383,7 +6383,7 @@
           <p:cNvPr id="1" name="">
             <a:extLst xmlns:a="http://schemas.openxmlformats.org/drawingml/2006/main">
               <a:ext uri="{FF2B5EF4-FFF2-40B4-BE49-F238E27FC236}">
-                <a16:creationId xmlns:a16="http://schemas.microsoft.com/office/drawing/2014/main" id="{23AA1C0D-AC5C-4796-BC72-E7387ED5F21B}"/>
+                <a16:creationId xmlns:a16="http://schemas.microsoft.com/office/drawing/2014/main" id="{33EB412F-8C82-4218-8CB0-DC68AAB4729E}"/>
               </a:ext>
             </a:extLst>
           </p:cNvPr>
@@ -6401,7 +6401,7 @@
             <a:avLst/>
           </a:prstGeom>
           <a:solidFill xmlns:a="http://schemas.openxmlformats.org/drawingml/2006/main">
-            <a:srgbClr val="0E1B3E"/>
+            <a:srgbClr val="070F26"/>
           </a:solidFill>
           <a:ln xmlns:a="http://schemas.openxmlformats.org/drawingml/2006/main" w="0">
             <a:solidFill>
@@ -6422,7 +6422,7 @@
           <p:nvPr/>
         </p:nvPicPr>
         <p:blipFill>
-          <a:blip xmlns:r="http://schemas.openxmlformats.org/officeDocument/2006/relationships" xmlns:a="http://schemas.openxmlformats.org/drawingml/2006/main" r:embed="Rbc9e396fb06a4cff"/>
+          <a:blip xmlns:r="http://schemas.openxmlformats.org/officeDocument/2006/relationships" xmlns:a="http://schemas.openxmlformats.org/drawingml/2006/main" r:embed="R7a7d2cb0780a4d91"/>
           <a:stretch xmlns:a="http://schemas.openxmlformats.org/drawingml/2006/main"/>
         </p:blipFill>
         <p:spPr>
@@ -6440,7 +6440,7 @@
           <p:cNvPr id="3" name="">
             <a:extLst xmlns:a="http://schemas.openxmlformats.org/drawingml/2006/main">
               <a:ext uri="{FF2B5EF4-FFF2-40B4-BE49-F238E27FC236}">
-                <a16:creationId xmlns:a16="http://schemas.microsoft.com/office/drawing/2014/main" id="{3504376D-0FE7-4820-86D3-1C4865458920}"/>
+                <a16:creationId xmlns:a16="http://schemas.microsoft.com/office/drawing/2014/main" id="{98D21DD0-1A86-4523-A2F6-3CC7809CD638}"/>
               </a:ext>
             </a:extLst>
           </p:cNvPr>
@@ -6498,7 +6498,7 @@
           <p:cNvPr id="4" name="">
             <a:extLst xmlns:a="http://schemas.openxmlformats.org/drawingml/2006/main">
               <a:ext uri="{FF2B5EF4-FFF2-40B4-BE49-F238E27FC236}">
-                <a16:creationId xmlns:a16="http://schemas.microsoft.com/office/drawing/2014/main" id="{426908F6-1F25-4219-97B3-8693BBBDBF6A}"/>
+                <a16:creationId xmlns:a16="http://schemas.microsoft.com/office/drawing/2014/main" id="{D33E3AC5-E833-4E95-85D3-BFC663F413EE}"/>
               </a:ext>
             </a:extLst>
           </p:cNvPr>
@@ -6556,7 +6556,7 @@
           <p:cNvPr id="5" name="">
             <a:extLst xmlns:a="http://schemas.openxmlformats.org/drawingml/2006/main">
               <a:ext uri="{FF2B5EF4-FFF2-40B4-BE49-F238E27FC236}">
-                <a16:creationId xmlns:a16="http://schemas.microsoft.com/office/drawing/2014/main" id="{88738EF1-DCD5-45B4-8DB2-C7777F3533ED}"/>
+                <a16:creationId xmlns:a16="http://schemas.microsoft.com/office/drawing/2014/main" id="{65E022F4-AE55-4C9E-9B16-77FF33165155}"/>
               </a:ext>
             </a:extLst>
           </p:cNvPr>
@@ -6618,7 +6618,7 @@
           <p:nvPr/>
         </p:nvPicPr>
         <p:blipFill>
-          <a:blip xmlns:r="http://schemas.openxmlformats.org/officeDocument/2006/relationships" xmlns:a="http://schemas.openxmlformats.org/drawingml/2006/main" r:embed="Rd0a76c8bd7f84d6c"/>
+          <a:blip xmlns:r="http://schemas.openxmlformats.org/officeDocument/2006/relationships" xmlns:a="http://schemas.openxmlformats.org/drawingml/2006/main" r:embed="R4f83de86ca304e3c"/>
           <a:stretch xmlns:a="http://schemas.openxmlformats.org/drawingml/2006/main"/>
         </p:blipFill>
         <p:spPr>
@@ -6636,7 +6636,7 @@
           <p:cNvPr id="7" name="">
             <a:extLst xmlns:a="http://schemas.openxmlformats.org/drawingml/2006/main">
               <a:ext uri="{FF2B5EF4-FFF2-40B4-BE49-F238E27FC236}">
-                <a16:creationId xmlns:a16="http://schemas.microsoft.com/office/drawing/2014/main" id="{FFF82F55-BE92-4363-A46C-4479FFC91FD1}"/>
+                <a16:creationId xmlns:a16="http://schemas.microsoft.com/office/drawing/2014/main" id="{11439A0E-DA45-442C-91F2-BCA0C200D52F}"/>
               </a:ext>
             </a:extLst>
           </p:cNvPr>
@@ -6694,7 +6694,7 @@
           <p:cNvPr id="8" name="">
             <a:extLst xmlns:a="http://schemas.openxmlformats.org/drawingml/2006/main">
               <a:ext uri="{FF2B5EF4-FFF2-40B4-BE49-F238E27FC236}">
-                <a16:creationId xmlns:a16="http://schemas.microsoft.com/office/drawing/2014/main" id="{A28409AD-97E2-4BED-B5C0-158BDA8D34A2}"/>
+                <a16:creationId xmlns:a16="http://schemas.microsoft.com/office/drawing/2014/main" id="{1AB0142C-34B6-49ED-943F-CCEA6AD3D0E5}"/>
               </a:ext>
             </a:extLst>
           </p:cNvPr>
@@ -6750,7 +6750,7 @@
     </p:spTree>
     <p:extLst>
       <p:ext uri="{BB962C8B-B14F-4D97-AF65-F5344CB8AC3E}">
-        <p14:creationId xmlns:p14="http://schemas.microsoft.com/office/powerpoint/2010/main" val="1433019666"/>
+        <p14:creationId xmlns:p14="http://schemas.microsoft.com/office/powerpoint/2010/main" val="115513934"/>
       </p:ext>
     </p:extLst>
   </p:cSld>
@@ -6781,7 +6781,7 @@
           <p:cNvPr id="1" name="">
             <a:extLst xmlns:a="http://schemas.openxmlformats.org/drawingml/2006/main">
               <a:ext uri="{FF2B5EF4-FFF2-40B4-BE49-F238E27FC236}">
-                <a16:creationId xmlns:a16="http://schemas.microsoft.com/office/drawing/2014/main" id="{D9DE361B-F330-4E41-8032-2E3FDAC77D4B}"/>
+                <a16:creationId xmlns:a16="http://schemas.microsoft.com/office/drawing/2014/main" id="{E9F7A61F-CF93-4798-A25B-ED2985C97644}"/>
               </a:ext>
             </a:extLst>
           </p:cNvPr>
@@ -6820,7 +6820,7 @@
           <p:nvPr/>
         </p:nvPicPr>
         <p:blipFill>
-          <a:blip xmlns:r="http://schemas.openxmlformats.org/officeDocument/2006/relationships" xmlns:a="http://schemas.openxmlformats.org/drawingml/2006/main" r:embed="R4ca2f642a1e0489f"/>
+          <a:blip xmlns:r="http://schemas.openxmlformats.org/officeDocument/2006/relationships" xmlns:a="http://schemas.openxmlformats.org/drawingml/2006/main" r:embed="Rc1d1b958e6064a32"/>
           <a:stretch xmlns:a="http://schemas.openxmlformats.org/drawingml/2006/main"/>
         </p:blipFill>
         <p:spPr>
@@ -6838,7 +6838,7 @@
           <p:cNvPr id="3" name="">
             <a:extLst xmlns:a="http://schemas.openxmlformats.org/drawingml/2006/main">
               <a:ext uri="{FF2B5EF4-FFF2-40B4-BE49-F238E27FC236}">
-                <a16:creationId xmlns:a16="http://schemas.microsoft.com/office/drawing/2014/main" id="{73639541-D4B8-4088-8430-4EDC511D6677}"/>
+                <a16:creationId xmlns:a16="http://schemas.microsoft.com/office/drawing/2014/main" id="{6070CCEE-CBB7-4FB7-86A9-E3C0B797FA9D}"/>
               </a:ext>
             </a:extLst>
           </p:cNvPr>
@@ -6876,14 +6876,14 @@
             <a:pPr algn="r">
               <a:defRPr sz="825" b="1">
                 <a:solidFill>
-                  <a:srgbClr val="0E1B3E"/>
+                  <a:srgbClr val="070F26"/>
                 </a:solidFill>
               </a:defRPr>
             </a:pPr>
             <a:r>
               <a:rPr sz="825" b="1">
                 <a:solidFill>
-                  <a:srgbClr val="0E1B3E"/>
+                  <a:srgbClr val="070F26"/>
                 </a:solidFill>
               </a:rPr>
               <a:t>NTT DATA UNIVERSITY</a:t>
@@ -6896,7 +6896,7 @@
           <p:cNvPr id="4" name="">
             <a:extLst xmlns:a="http://schemas.openxmlformats.org/drawingml/2006/main">
               <a:ext uri="{FF2B5EF4-FFF2-40B4-BE49-F238E27FC236}">
-                <a16:creationId xmlns:a16="http://schemas.microsoft.com/office/drawing/2014/main" id="{D87F44F8-9F62-420B-A6AE-F4001CB8C5B8}"/>
+                <a16:creationId xmlns:a16="http://schemas.microsoft.com/office/drawing/2014/main" id="{B490C913-F8DA-4DE2-A4DA-C82E7E6FBD26}"/>
               </a:ext>
             </a:extLst>
           </p:cNvPr>
@@ -6954,7 +6954,7 @@
           <p:cNvPr id="5" name="">
             <a:extLst xmlns:a="http://schemas.openxmlformats.org/drawingml/2006/main">
               <a:ext uri="{FF2B5EF4-FFF2-40B4-BE49-F238E27FC236}">
-                <a16:creationId xmlns:a16="http://schemas.microsoft.com/office/drawing/2014/main" id="{E6016E9F-B221-4F33-A338-BC97EEAB8206}"/>
+                <a16:creationId xmlns:a16="http://schemas.microsoft.com/office/drawing/2014/main" id="{E2423C18-19A9-4274-A6EE-9B2D0BA6AA2D}"/>
               </a:ext>
             </a:extLst>
           </p:cNvPr>
@@ -7012,7 +7012,7 @@
           <p:cNvPr id="6" name="">
             <a:extLst xmlns:a="http://schemas.openxmlformats.org/drawingml/2006/main">
               <a:ext uri="{FF2B5EF4-FFF2-40B4-BE49-F238E27FC236}">
-                <a16:creationId xmlns:a16="http://schemas.microsoft.com/office/drawing/2014/main" id="{9DC6A44B-3872-42E7-B385-705C794E3FB3}"/>
+                <a16:creationId xmlns:a16="http://schemas.microsoft.com/office/drawing/2014/main" id="{18A74AAE-C89E-4675-AA2D-1578DAF7C2BA}"/>
               </a:ext>
             </a:extLst>
           </p:cNvPr>
@@ -7050,14 +7050,14 @@
             <a:pPr algn="r">
               <a:defRPr sz="675" b="1">
                 <a:solidFill>
-                  <a:srgbClr val="0E1B3E"/>
+                  <a:srgbClr val="070F26"/>
                 </a:solidFill>
               </a:defRPr>
             </a:pPr>
             <a:r>
               <a:rPr sz="675" b="1">
                 <a:solidFill>
-                  <a:srgbClr val="0E1B3E"/>
+                  <a:srgbClr val="070F26"/>
                 </a:solidFill>
               </a:rPr>
               <a:t>NTT DATA UNIVERSITY</a:t>
@@ -7070,7 +7070,7 @@
           <p:cNvPr id="7" name="">
             <a:extLst xmlns:a="http://schemas.openxmlformats.org/drawingml/2006/main">
               <a:ext uri="{FF2B5EF4-FFF2-40B4-BE49-F238E27FC236}">
-                <a16:creationId xmlns:a16="http://schemas.microsoft.com/office/drawing/2014/main" id="{796061F3-3D36-49B8-BCA8-F2702D4F9918}"/>
+                <a16:creationId xmlns:a16="http://schemas.microsoft.com/office/drawing/2014/main" id="{93E01143-7AA9-4B15-97CE-9473247194DE}"/>
               </a:ext>
             </a:extLst>
           </p:cNvPr>
@@ -7128,7 +7128,7 @@
           <p:cNvPr id="8" name="">
             <a:extLst xmlns:a="http://schemas.openxmlformats.org/drawingml/2006/main">
               <a:ext uri="{FF2B5EF4-FFF2-40B4-BE49-F238E27FC236}">
-                <a16:creationId xmlns:a16="http://schemas.microsoft.com/office/drawing/2014/main" id="{470125E5-41EE-444B-ADB1-CA240B11C856}"/>
+                <a16:creationId xmlns:a16="http://schemas.microsoft.com/office/drawing/2014/main" id="{6D5AF522-FB02-4CD5-943F-82DA4D975774}"/>
               </a:ext>
             </a:extLst>
           </p:cNvPr>
@@ -7166,14 +7166,14 @@
             <a:pPr algn="l">
               <a:defRPr sz="2400" b="0">
                 <a:solidFill>
-                  <a:srgbClr val="0E1B3E"/>
+                  <a:srgbClr val="070F26"/>
                 </a:solidFill>
               </a:defRPr>
             </a:pPr>
             <a:r>
               <a:rPr sz="2400" b="0">
                 <a:solidFill>
-                  <a:srgbClr val="0E1B3E"/>
+                  <a:srgbClr val="070F26"/>
                 </a:solidFill>
               </a:rPr>
               <a:t>O que vamos fazer hoje</a:t>
@@ -7186,7 +7186,7 @@
           <p:cNvPr id="9" name="">
             <a:extLst xmlns:a="http://schemas.openxmlformats.org/drawingml/2006/main">
               <a:ext uri="{FF2B5EF4-FFF2-40B4-BE49-F238E27FC236}">
-                <a16:creationId xmlns:a16="http://schemas.microsoft.com/office/drawing/2014/main" id="{7958CA39-DBDE-4993-8B49-3A81695215C1}"/>
+                <a16:creationId xmlns:a16="http://schemas.microsoft.com/office/drawing/2014/main" id="{2B8DD290-82F2-4D8F-A6B2-DB4D8BBF506B}"/>
               </a:ext>
             </a:extLst>
           </p:cNvPr>
@@ -7244,7 +7244,7 @@
           <p:cNvPr id="10" name="">
             <a:extLst xmlns:a="http://schemas.openxmlformats.org/drawingml/2006/main">
               <a:ext uri="{FF2B5EF4-FFF2-40B4-BE49-F238E27FC236}">
-                <a16:creationId xmlns:a16="http://schemas.microsoft.com/office/drawing/2014/main" id="{E5091BA7-0E33-4803-BF16-4A46F9349871}"/>
+                <a16:creationId xmlns:a16="http://schemas.microsoft.com/office/drawing/2014/main" id="{2E60C3DD-45B8-4C73-8977-45E28EC8AF8B}"/>
               </a:ext>
             </a:extLst>
           </p:cNvPr>
@@ -7277,7 +7277,7 @@
           <p:cNvPr id="11" name="">
             <a:extLst xmlns:a="http://schemas.openxmlformats.org/drawingml/2006/main">
               <a:ext uri="{FF2B5EF4-FFF2-40B4-BE49-F238E27FC236}">
-                <a16:creationId xmlns:a16="http://schemas.microsoft.com/office/drawing/2014/main" id="{61E9EC93-F1E0-490A-A3B9-A71FF2DF62A1}"/>
+                <a16:creationId xmlns:a16="http://schemas.microsoft.com/office/drawing/2014/main" id="{5A2CA861-7331-44FE-BE7B-AFC0C7ECB9CC}"/>
               </a:ext>
             </a:extLst>
           </p:cNvPr>
@@ -7312,7 +7312,7 @@
           <p:cNvPr id="12" name="">
             <a:extLst xmlns:a="http://schemas.openxmlformats.org/drawingml/2006/main">
               <a:ext uri="{FF2B5EF4-FFF2-40B4-BE49-F238E27FC236}">
-                <a16:creationId xmlns:a16="http://schemas.microsoft.com/office/drawing/2014/main" id="{984D7281-FC08-4002-B4C1-9FB47ADD8BC8}"/>
+                <a16:creationId xmlns:a16="http://schemas.microsoft.com/office/drawing/2014/main" id="{35A30D77-90C3-426F-9FE6-61EE02027ECF}"/>
               </a:ext>
             </a:extLst>
           </p:cNvPr>
@@ -7370,7 +7370,7 @@
           <p:cNvPr id="13" name="">
             <a:extLst xmlns:a="http://schemas.openxmlformats.org/drawingml/2006/main">
               <a:ext uri="{FF2B5EF4-FFF2-40B4-BE49-F238E27FC236}">
-                <a16:creationId xmlns:a16="http://schemas.microsoft.com/office/drawing/2014/main" id="{526E7FDC-CEA3-406E-AFC2-296072344C66}"/>
+                <a16:creationId xmlns:a16="http://schemas.microsoft.com/office/drawing/2014/main" id="{521C2656-5993-4963-A9C5-7F8A6C35C09B}"/>
               </a:ext>
             </a:extLst>
           </p:cNvPr>
@@ -7445,7 +7445,7 @@
           <p:cNvPr id="14" name="">
             <a:extLst xmlns:a="http://schemas.openxmlformats.org/drawingml/2006/main">
               <a:ext uri="{FF2B5EF4-FFF2-40B4-BE49-F238E27FC236}">
-                <a16:creationId xmlns:a16="http://schemas.microsoft.com/office/drawing/2014/main" id="{B195BA7F-DD34-4A3B-A649-41BDBAD88A98}"/>
+                <a16:creationId xmlns:a16="http://schemas.microsoft.com/office/drawing/2014/main" id="{F87D46B5-C43E-49BC-B652-14FAC91135C3}"/>
               </a:ext>
             </a:extLst>
           </p:cNvPr>
@@ -7478,7 +7478,7 @@
           <p:cNvPr id="15" name="">
             <a:extLst xmlns:a="http://schemas.openxmlformats.org/drawingml/2006/main">
               <a:ext uri="{FF2B5EF4-FFF2-40B4-BE49-F238E27FC236}">
-                <a16:creationId xmlns:a16="http://schemas.microsoft.com/office/drawing/2014/main" id="{F906DA9A-CDAB-48DC-8810-2A8D84ADCEAB}"/>
+                <a16:creationId xmlns:a16="http://schemas.microsoft.com/office/drawing/2014/main" id="{DC83D6C1-67FC-49B2-B8D3-4950DDDD0583}"/>
               </a:ext>
             </a:extLst>
           </p:cNvPr>
@@ -7513,7 +7513,7 @@
           <p:cNvPr id="16" name="">
             <a:extLst xmlns:a="http://schemas.openxmlformats.org/drawingml/2006/main">
               <a:ext uri="{FF2B5EF4-FFF2-40B4-BE49-F238E27FC236}">
-                <a16:creationId xmlns:a16="http://schemas.microsoft.com/office/drawing/2014/main" id="{583148DB-B860-40BE-A351-DED7A6F07894}"/>
+                <a16:creationId xmlns:a16="http://schemas.microsoft.com/office/drawing/2014/main" id="{EB342D0D-6FD7-4809-A99D-063B1786B857}"/>
               </a:ext>
             </a:extLst>
           </p:cNvPr>
@@ -7571,7 +7571,7 @@
           <p:cNvPr id="17" name="">
             <a:extLst xmlns:a="http://schemas.openxmlformats.org/drawingml/2006/main">
               <a:ext uri="{FF2B5EF4-FFF2-40B4-BE49-F238E27FC236}">
-                <a16:creationId xmlns:a16="http://schemas.microsoft.com/office/drawing/2014/main" id="{9E06D83E-3F65-4428-B421-B6E8F82600DC}"/>
+                <a16:creationId xmlns:a16="http://schemas.microsoft.com/office/drawing/2014/main" id="{EB586A49-BAD0-42F3-AEB7-C8E59693523B}"/>
               </a:ext>
             </a:extLst>
           </p:cNvPr>
@@ -7646,7 +7646,7 @@
           <p:cNvPr id="18" name="">
             <a:extLst xmlns:a="http://schemas.openxmlformats.org/drawingml/2006/main">
               <a:ext uri="{FF2B5EF4-FFF2-40B4-BE49-F238E27FC236}">
-                <a16:creationId xmlns:a16="http://schemas.microsoft.com/office/drawing/2014/main" id="{17AC0900-32FF-4170-926E-F93D3183FE9A}"/>
+                <a16:creationId xmlns:a16="http://schemas.microsoft.com/office/drawing/2014/main" id="{A8AAEB08-D9AA-49CE-A8FE-4365C7C76154}"/>
               </a:ext>
             </a:extLst>
           </p:cNvPr>
@@ -7679,7 +7679,7 @@
           <p:cNvPr id="19" name="">
             <a:extLst xmlns:a="http://schemas.openxmlformats.org/drawingml/2006/main">
               <a:ext uri="{FF2B5EF4-FFF2-40B4-BE49-F238E27FC236}">
-                <a16:creationId xmlns:a16="http://schemas.microsoft.com/office/drawing/2014/main" id="{AA7000AA-DDD8-4DFC-AC64-A99F06248344}"/>
+                <a16:creationId xmlns:a16="http://schemas.microsoft.com/office/drawing/2014/main" id="{3A537249-1A16-499F-959A-FC5D32670CF3}"/>
               </a:ext>
             </a:extLst>
           </p:cNvPr>
@@ -7714,7 +7714,7 @@
           <p:cNvPr id="20" name="">
             <a:extLst xmlns:a="http://schemas.openxmlformats.org/drawingml/2006/main">
               <a:ext uri="{FF2B5EF4-FFF2-40B4-BE49-F238E27FC236}">
-                <a16:creationId xmlns:a16="http://schemas.microsoft.com/office/drawing/2014/main" id="{43050362-4832-41F4-B0DA-AC2E4866747F}"/>
+                <a16:creationId xmlns:a16="http://schemas.microsoft.com/office/drawing/2014/main" id="{F68DD543-958B-4953-9022-E3C00ADEDBFB}"/>
               </a:ext>
             </a:extLst>
           </p:cNvPr>
@@ -7772,7 +7772,7 @@
           <p:cNvPr id="21" name="">
             <a:extLst xmlns:a="http://schemas.openxmlformats.org/drawingml/2006/main">
               <a:ext uri="{FF2B5EF4-FFF2-40B4-BE49-F238E27FC236}">
-                <a16:creationId xmlns:a16="http://schemas.microsoft.com/office/drawing/2014/main" id="{E76F2B76-6496-4DA6-9DAE-22895F863632}"/>
+                <a16:creationId xmlns:a16="http://schemas.microsoft.com/office/drawing/2014/main" id="{78452A0B-524E-4EF8-9AED-60A75BDC9300}"/>
               </a:ext>
             </a:extLst>
           </p:cNvPr>
@@ -7862,7 +7862,7 @@
     </p:spTree>
     <p:extLst>
       <p:ext uri="{BB962C8B-B14F-4D97-AF65-F5344CB8AC3E}">
-        <p14:creationId xmlns:p14="http://schemas.microsoft.com/office/powerpoint/2010/main" val="1106012113"/>
+        <p14:creationId xmlns:p14="http://schemas.microsoft.com/office/powerpoint/2010/main" val="2128791320"/>
       </p:ext>
     </p:extLst>
   </p:cSld>
@@ -7875,7 +7875,7 @@
     <p:bg>
       <p:bgPr>
         <a:solidFill xmlns:a="http://schemas.openxmlformats.org/drawingml/2006/main">
-          <a:srgbClr val="0E1B3E"/>
+          <a:srgbClr val="070F26"/>
         </a:solidFill>
       </p:bgPr>
     </p:bg>
@@ -7893,7 +7893,7 @@
           <p:cNvPr id="1" name="">
             <a:extLst xmlns:a="http://schemas.openxmlformats.org/drawingml/2006/main">
               <a:ext uri="{FF2B5EF4-FFF2-40B4-BE49-F238E27FC236}">
-                <a16:creationId xmlns:a16="http://schemas.microsoft.com/office/drawing/2014/main" id="{FA001CA1-10D1-4D68-94B0-C449C5F27A21}"/>
+                <a16:creationId xmlns:a16="http://schemas.microsoft.com/office/drawing/2014/main" id="{C7DB7CEE-EF28-4AD8-BB99-CB0EF2CA33BA}"/>
               </a:ext>
             </a:extLst>
           </p:cNvPr>
@@ -7911,7 +7911,7 @@
             <a:avLst/>
           </a:prstGeom>
           <a:solidFill xmlns:a="http://schemas.openxmlformats.org/drawingml/2006/main">
-            <a:srgbClr val="0E1B3E"/>
+            <a:srgbClr val="070F26"/>
           </a:solidFill>
           <a:ln xmlns:a="http://schemas.openxmlformats.org/drawingml/2006/main" w="0">
             <a:solidFill>
@@ -7932,7 +7932,7 @@
           <p:nvPr/>
         </p:nvPicPr>
         <p:blipFill>
-          <a:blip xmlns:r="http://schemas.openxmlformats.org/officeDocument/2006/relationships" xmlns:a="http://schemas.openxmlformats.org/drawingml/2006/main" r:embed="R42e3ce6d8b724141"/>
+          <a:blip xmlns:r="http://schemas.openxmlformats.org/officeDocument/2006/relationships" xmlns:a="http://schemas.openxmlformats.org/drawingml/2006/main" r:embed="R2cb7d2bdaafd42e4"/>
           <a:stretch xmlns:a="http://schemas.openxmlformats.org/drawingml/2006/main"/>
         </p:blipFill>
         <p:spPr>
@@ -7950,7 +7950,7 @@
           <p:cNvPr id="3" name="">
             <a:extLst xmlns:a="http://schemas.openxmlformats.org/drawingml/2006/main">
               <a:ext uri="{FF2B5EF4-FFF2-40B4-BE49-F238E27FC236}">
-                <a16:creationId xmlns:a16="http://schemas.microsoft.com/office/drawing/2014/main" id="{0EA06F0E-9843-43F9-A362-C8056D9C77C8}"/>
+                <a16:creationId xmlns:a16="http://schemas.microsoft.com/office/drawing/2014/main" id="{CAD050CA-A6C7-4DE9-BFDF-83F3D5196E71}"/>
               </a:ext>
             </a:extLst>
           </p:cNvPr>
@@ -8008,7 +8008,7 @@
           <p:cNvPr id="4" name="">
             <a:extLst xmlns:a="http://schemas.openxmlformats.org/drawingml/2006/main">
               <a:ext uri="{FF2B5EF4-FFF2-40B4-BE49-F238E27FC236}">
-                <a16:creationId xmlns:a16="http://schemas.microsoft.com/office/drawing/2014/main" id="{603FB58C-7235-487F-9A75-B4C5433F8B61}"/>
+                <a16:creationId xmlns:a16="http://schemas.microsoft.com/office/drawing/2014/main" id="{FE9C72D1-E410-40BB-999D-FC6C6A682DEA}"/>
               </a:ext>
             </a:extLst>
           </p:cNvPr>
@@ -8066,7 +8066,7 @@
           <p:cNvPr id="5" name="">
             <a:extLst xmlns:a="http://schemas.openxmlformats.org/drawingml/2006/main">
               <a:ext uri="{FF2B5EF4-FFF2-40B4-BE49-F238E27FC236}">
-                <a16:creationId xmlns:a16="http://schemas.microsoft.com/office/drawing/2014/main" id="{DA3707C3-6949-43A1-AC08-C35502689487}"/>
+                <a16:creationId xmlns:a16="http://schemas.microsoft.com/office/drawing/2014/main" id="{242ABAA8-174F-4DCD-99A4-CAF567211A53}"/>
               </a:ext>
             </a:extLst>
           </p:cNvPr>
@@ -8124,7 +8124,7 @@
           <p:cNvPr id="6" name="">
             <a:extLst xmlns:a="http://schemas.openxmlformats.org/drawingml/2006/main">
               <a:ext uri="{FF2B5EF4-FFF2-40B4-BE49-F238E27FC236}">
-                <a16:creationId xmlns:a16="http://schemas.microsoft.com/office/drawing/2014/main" id="{7DC33723-5C47-4054-A4C8-07B5A78CFC93}"/>
+                <a16:creationId xmlns:a16="http://schemas.microsoft.com/office/drawing/2014/main" id="{2DC6A906-753E-43A3-9C96-C599E4EC2070}"/>
               </a:ext>
             </a:extLst>
           </p:cNvPr>
@@ -8186,13 +8186,13 @@
           <p:nvPr/>
         </p:nvPicPr>
         <p:blipFill>
-          <a:blip xmlns:r="http://schemas.openxmlformats.org/officeDocument/2006/relationships" xmlns:a="http://schemas.openxmlformats.org/drawingml/2006/main" r:embed="R96bfeb8baa424392"/>
+          <a:blip xmlns:r="http://schemas.openxmlformats.org/officeDocument/2006/relationships" xmlns:a="http://schemas.openxmlformats.org/drawingml/2006/main" r:embed="R4ffd42f163d946ce"/>
           <a:stretch xmlns:a="http://schemas.openxmlformats.org/drawingml/2006/main"/>
         </p:blipFill>
         <p:spPr>
           <a:xfrm xmlns:a="http://schemas.openxmlformats.org/drawingml/2006/main">
-            <a:off x="476250" y="1257300"/>
-            <a:ext cx="2667000" cy="4533900"/>
+            <a:off x="0" y="1746250"/>
+            <a:ext cx="2667000" cy="3556000"/>
           </a:xfrm>
           <a:prstGeom xmlns:a="http://schemas.openxmlformats.org/drawingml/2006/main" prst="rect">
             <a:avLst/>
@@ -8204,7 +8204,7 @@
           <p:cNvPr id="8" name="">
             <a:extLst xmlns:a="http://schemas.openxmlformats.org/drawingml/2006/main">
               <a:ext uri="{FF2B5EF4-FFF2-40B4-BE49-F238E27FC236}">
-                <a16:creationId xmlns:a16="http://schemas.microsoft.com/office/drawing/2014/main" id="{1255E9AA-07B4-4313-AC64-1868FD855179}"/>
+                <a16:creationId xmlns:a16="http://schemas.microsoft.com/office/drawing/2014/main" id="{B7B3D371-7553-4C31-86E6-DA4D3D99D9CF}"/>
               </a:ext>
             </a:extLst>
           </p:cNvPr>
@@ -8262,7 +8262,7 @@
           <p:cNvPr id="9" name="">
             <a:extLst xmlns:a="http://schemas.openxmlformats.org/drawingml/2006/main">
               <a:ext uri="{FF2B5EF4-FFF2-40B4-BE49-F238E27FC236}">
-                <a16:creationId xmlns:a16="http://schemas.microsoft.com/office/drawing/2014/main" id="{A45E5676-8B52-45F6-BD1F-326D1A51992C}"/>
+                <a16:creationId xmlns:a16="http://schemas.microsoft.com/office/drawing/2014/main" id="{40B5CE31-1316-4AA9-A875-EC1B1C5DAA42}"/>
               </a:ext>
             </a:extLst>
           </p:cNvPr>
@@ -8320,7 +8320,7 @@
           <p:cNvPr id="10" name="">
             <a:extLst xmlns:a="http://schemas.openxmlformats.org/drawingml/2006/main">
               <a:ext uri="{FF2B5EF4-FFF2-40B4-BE49-F238E27FC236}">
-                <a16:creationId xmlns:a16="http://schemas.microsoft.com/office/drawing/2014/main" id="{AD83F720-0C1F-4B03-A2AF-98AAED5F56E4}"/>
+                <a16:creationId xmlns:a16="http://schemas.microsoft.com/office/drawing/2014/main" id="{E4FF564C-89D4-419B-8A6F-BAA76AC27C6C}"/>
               </a:ext>
             </a:extLst>
           </p:cNvPr>
@@ -8376,7 +8376,7 @@
     </p:spTree>
     <p:extLst>
       <p:ext uri="{BB962C8B-B14F-4D97-AF65-F5344CB8AC3E}">
-        <p14:creationId xmlns:p14="http://schemas.microsoft.com/office/powerpoint/2010/main" val="1159385284"/>
+        <p14:creationId xmlns:p14="http://schemas.microsoft.com/office/powerpoint/2010/main" val="1636877372"/>
       </p:ext>
     </p:extLst>
   </p:cSld>
@@ -8407,7 +8407,7 @@
           <p:cNvPr id="1" name="">
             <a:extLst xmlns:a="http://schemas.openxmlformats.org/drawingml/2006/main">
               <a:ext uri="{FF2B5EF4-FFF2-40B4-BE49-F238E27FC236}">
-                <a16:creationId xmlns:a16="http://schemas.microsoft.com/office/drawing/2014/main" id="{1CD46867-8EF7-4EB1-AE88-E9384F6C47F3}"/>
+                <a16:creationId xmlns:a16="http://schemas.microsoft.com/office/drawing/2014/main" id="{AE4FB966-1B80-4222-BE88-724B9B57D87F}"/>
               </a:ext>
             </a:extLst>
           </p:cNvPr>
@@ -8446,7 +8446,7 @@
           <p:nvPr/>
         </p:nvPicPr>
         <p:blipFill>
-          <a:blip xmlns:r="http://schemas.openxmlformats.org/officeDocument/2006/relationships" xmlns:a="http://schemas.openxmlformats.org/drawingml/2006/main" r:embed="R97f8b434b9b04c8d"/>
+          <a:blip xmlns:r="http://schemas.openxmlformats.org/officeDocument/2006/relationships" xmlns:a="http://schemas.openxmlformats.org/drawingml/2006/main" r:embed="R6a74818b8e0343d3"/>
           <a:stretch xmlns:a="http://schemas.openxmlformats.org/drawingml/2006/main"/>
         </p:blipFill>
         <p:spPr>
@@ -8464,7 +8464,7 @@
           <p:cNvPr id="3" name="">
             <a:extLst xmlns:a="http://schemas.openxmlformats.org/drawingml/2006/main">
               <a:ext uri="{FF2B5EF4-FFF2-40B4-BE49-F238E27FC236}">
-                <a16:creationId xmlns:a16="http://schemas.microsoft.com/office/drawing/2014/main" id="{3C72ADC5-B599-42AB-8BEB-7C30BEAC999C}"/>
+                <a16:creationId xmlns:a16="http://schemas.microsoft.com/office/drawing/2014/main" id="{5F0E8B93-006E-43D6-9718-EFE4DEA421EB}"/>
               </a:ext>
             </a:extLst>
           </p:cNvPr>
@@ -8502,14 +8502,14 @@
             <a:pPr algn="r">
               <a:defRPr sz="825" b="1">
                 <a:solidFill>
-                  <a:srgbClr val="0E1B3E"/>
+                  <a:srgbClr val="070F26"/>
                 </a:solidFill>
               </a:defRPr>
             </a:pPr>
             <a:r>
               <a:rPr sz="825" b="1">
                 <a:solidFill>
-                  <a:srgbClr val="0E1B3E"/>
+                  <a:srgbClr val="070F26"/>
                 </a:solidFill>
               </a:rPr>
               <a:t>NTT DATA UNIVERSITY</a:t>
@@ -8522,7 +8522,7 @@
           <p:cNvPr id="4" name="">
             <a:extLst xmlns:a="http://schemas.openxmlformats.org/drawingml/2006/main">
               <a:ext uri="{FF2B5EF4-FFF2-40B4-BE49-F238E27FC236}">
-                <a16:creationId xmlns:a16="http://schemas.microsoft.com/office/drawing/2014/main" id="{D90E0B97-AAB8-4F45-9A34-FBD7EF9B55ED}"/>
+                <a16:creationId xmlns:a16="http://schemas.microsoft.com/office/drawing/2014/main" id="{2BA56D95-FFC1-452C-AF13-3576E82EBE3E}"/>
               </a:ext>
             </a:extLst>
           </p:cNvPr>
@@ -8580,7 +8580,7 @@
           <p:cNvPr id="5" name="">
             <a:extLst xmlns:a="http://schemas.openxmlformats.org/drawingml/2006/main">
               <a:ext uri="{FF2B5EF4-FFF2-40B4-BE49-F238E27FC236}">
-                <a16:creationId xmlns:a16="http://schemas.microsoft.com/office/drawing/2014/main" id="{11F106E0-C7F7-4E39-9629-D7E6810A22CD}"/>
+                <a16:creationId xmlns:a16="http://schemas.microsoft.com/office/drawing/2014/main" id="{66EAA4BB-07AD-43BF-BF4B-C4CCE8D49728}"/>
               </a:ext>
             </a:extLst>
           </p:cNvPr>
@@ -8638,7 +8638,7 @@
           <p:cNvPr id="6" name="">
             <a:extLst xmlns:a="http://schemas.openxmlformats.org/drawingml/2006/main">
               <a:ext uri="{FF2B5EF4-FFF2-40B4-BE49-F238E27FC236}">
-                <a16:creationId xmlns:a16="http://schemas.microsoft.com/office/drawing/2014/main" id="{FD40557D-A7E9-426C-9C13-B57984A3B98A}"/>
+                <a16:creationId xmlns:a16="http://schemas.microsoft.com/office/drawing/2014/main" id="{5D8FC6D6-EBE7-4D3B-9C4E-8DBB5E7FE67C}"/>
               </a:ext>
             </a:extLst>
           </p:cNvPr>
@@ -8676,14 +8676,14 @@
             <a:pPr algn="r">
               <a:defRPr sz="675" b="1">
                 <a:solidFill>
-                  <a:srgbClr val="0E1B3E"/>
+                  <a:srgbClr val="070F26"/>
                 </a:solidFill>
               </a:defRPr>
             </a:pPr>
             <a:r>
               <a:rPr sz="675" b="1">
                 <a:solidFill>
-                  <a:srgbClr val="0E1B3E"/>
+                  <a:srgbClr val="070F26"/>
                 </a:solidFill>
               </a:rPr>
               <a:t>NTT DATA UNIVERSITY</a:t>
@@ -8696,7 +8696,7 @@
           <p:cNvPr id="7" name="">
             <a:extLst xmlns:a="http://schemas.openxmlformats.org/drawingml/2006/main">
               <a:ext uri="{FF2B5EF4-FFF2-40B4-BE49-F238E27FC236}">
-                <a16:creationId xmlns:a16="http://schemas.microsoft.com/office/drawing/2014/main" id="{454A2A19-A55D-499B-9E92-808CD97AC795}"/>
+                <a16:creationId xmlns:a16="http://schemas.microsoft.com/office/drawing/2014/main" id="{1E4D5029-8368-4A7A-AF8D-4A284DF0C68C}"/>
               </a:ext>
             </a:extLst>
           </p:cNvPr>
@@ -8754,7 +8754,7 @@
           <p:cNvPr id="8" name="">
             <a:extLst xmlns:a="http://schemas.openxmlformats.org/drawingml/2006/main">
               <a:ext uri="{FF2B5EF4-FFF2-40B4-BE49-F238E27FC236}">
-                <a16:creationId xmlns:a16="http://schemas.microsoft.com/office/drawing/2014/main" id="{A7F35303-4050-4278-80EF-ED34F5E60258}"/>
+                <a16:creationId xmlns:a16="http://schemas.microsoft.com/office/drawing/2014/main" id="{01F3FCD3-63BF-4164-B098-D86FDB183A91}"/>
               </a:ext>
             </a:extLst>
           </p:cNvPr>
@@ -8792,14 +8792,14 @@
             <a:pPr algn="l">
               <a:defRPr sz="2400" b="0">
                 <a:solidFill>
-                  <a:srgbClr val="0E1B3E"/>
+                  <a:srgbClr val="070F26"/>
                 </a:solidFill>
               </a:defRPr>
             </a:pPr>
             <a:r>
               <a:rPr sz="2400" b="0">
                 <a:solidFill>
-                  <a:srgbClr val="0E1B3E"/>
+                  <a:srgbClr val="070F26"/>
                 </a:solidFill>
               </a:rPr>
               <a:t>Pontos que costumam gerar dúvida no conteúdo</a:t>
@@ -8812,7 +8812,7 @@
           <p:cNvPr id="9" name="">
             <a:extLst xmlns:a="http://schemas.openxmlformats.org/drawingml/2006/main">
               <a:ext uri="{FF2B5EF4-FFF2-40B4-BE49-F238E27FC236}">
-                <a16:creationId xmlns:a16="http://schemas.microsoft.com/office/drawing/2014/main" id="{2997FE03-13DB-4B1D-8A72-55506EA6B6E4}"/>
+                <a16:creationId xmlns:a16="http://schemas.microsoft.com/office/drawing/2014/main" id="{D52CA131-B079-4164-9B96-A78E840F30CC}"/>
               </a:ext>
             </a:extLst>
           </p:cNvPr>
@@ -8870,7 +8870,7 @@
           <p:cNvPr id="10" name="">
             <a:extLst xmlns:a="http://schemas.openxmlformats.org/drawingml/2006/main">
               <a:ext uri="{FF2B5EF4-FFF2-40B4-BE49-F238E27FC236}">
-                <a16:creationId xmlns:a16="http://schemas.microsoft.com/office/drawing/2014/main" id="{7C12062F-4B87-44A8-BCCA-75D055B4D8C8}"/>
+                <a16:creationId xmlns:a16="http://schemas.microsoft.com/office/drawing/2014/main" id="{930A52B6-4391-4972-85B1-9BB475BD1C1F}"/>
               </a:ext>
             </a:extLst>
           </p:cNvPr>
@@ -8903,7 +8903,7 @@
           <p:cNvPr id="11" name="">
             <a:extLst xmlns:a="http://schemas.openxmlformats.org/drawingml/2006/main">
               <a:ext uri="{FF2B5EF4-FFF2-40B4-BE49-F238E27FC236}">
-                <a16:creationId xmlns:a16="http://schemas.microsoft.com/office/drawing/2014/main" id="{8F6A11BC-0CD4-45B8-8953-0AE903608AE9}"/>
+                <a16:creationId xmlns:a16="http://schemas.microsoft.com/office/drawing/2014/main" id="{27F2B5D3-F8E9-487A-9590-2280B9302321}"/>
               </a:ext>
             </a:extLst>
           </p:cNvPr>
@@ -8938,7 +8938,7 @@
           <p:cNvPr id="12" name="">
             <a:extLst xmlns:a="http://schemas.openxmlformats.org/drawingml/2006/main">
               <a:ext uri="{FF2B5EF4-FFF2-40B4-BE49-F238E27FC236}">
-                <a16:creationId xmlns:a16="http://schemas.microsoft.com/office/drawing/2014/main" id="{03D094F0-B672-413F-ABF5-9C8BD09DFC6E}"/>
+                <a16:creationId xmlns:a16="http://schemas.microsoft.com/office/drawing/2014/main" id="{11E2F41F-391A-4124-81B2-1538EAE255A4}"/>
               </a:ext>
             </a:extLst>
           </p:cNvPr>
@@ -8996,7 +8996,7 @@
           <p:cNvPr id="13" name="">
             <a:extLst xmlns:a="http://schemas.openxmlformats.org/drawingml/2006/main">
               <a:ext uri="{FF2B5EF4-FFF2-40B4-BE49-F238E27FC236}">
-                <a16:creationId xmlns:a16="http://schemas.microsoft.com/office/drawing/2014/main" id="{58D0D989-8B6E-4D27-8DD2-9F8306CCE398}"/>
+                <a16:creationId xmlns:a16="http://schemas.microsoft.com/office/drawing/2014/main" id="{5C6E262F-DDBF-4B6D-8284-30BF6E698971}"/>
               </a:ext>
             </a:extLst>
           </p:cNvPr>
@@ -9122,7 +9122,7 @@
           <p:cNvPr id="14" name="">
             <a:extLst xmlns:a="http://schemas.openxmlformats.org/drawingml/2006/main">
               <a:ext uri="{FF2B5EF4-FFF2-40B4-BE49-F238E27FC236}">
-                <a16:creationId xmlns:a16="http://schemas.microsoft.com/office/drawing/2014/main" id="{77D6FFDB-0BB6-4540-BA64-FAF49DDB21F4}"/>
+                <a16:creationId xmlns:a16="http://schemas.microsoft.com/office/drawing/2014/main" id="{E47D0DC7-E0F2-4273-BC39-90DC0DB90500}"/>
               </a:ext>
             </a:extLst>
           </p:cNvPr>
@@ -9155,7 +9155,7 @@
           <p:cNvPr id="15" name="">
             <a:extLst xmlns:a="http://schemas.openxmlformats.org/drawingml/2006/main">
               <a:ext uri="{FF2B5EF4-FFF2-40B4-BE49-F238E27FC236}">
-                <a16:creationId xmlns:a16="http://schemas.microsoft.com/office/drawing/2014/main" id="{B186FA87-DB5F-4247-877A-1BAA06452524}"/>
+                <a16:creationId xmlns:a16="http://schemas.microsoft.com/office/drawing/2014/main" id="{D8AA6CA1-4F46-43EB-ABA6-BDB47914F704}"/>
               </a:ext>
             </a:extLst>
           </p:cNvPr>
@@ -9190,7 +9190,7 @@
           <p:cNvPr id="16" name="">
             <a:extLst xmlns:a="http://schemas.openxmlformats.org/drawingml/2006/main">
               <a:ext uri="{FF2B5EF4-FFF2-40B4-BE49-F238E27FC236}">
-                <a16:creationId xmlns:a16="http://schemas.microsoft.com/office/drawing/2014/main" id="{5BD10AA2-BC33-4CC6-9A12-AE87186A8354}"/>
+                <a16:creationId xmlns:a16="http://schemas.microsoft.com/office/drawing/2014/main" id="{9C8D7720-5685-4F36-B735-BBA922C412A6}"/>
               </a:ext>
             </a:extLst>
           </p:cNvPr>
@@ -9248,7 +9248,7 @@
           <p:cNvPr id="17" name="">
             <a:extLst xmlns:a="http://schemas.openxmlformats.org/drawingml/2006/main">
               <a:ext uri="{FF2B5EF4-FFF2-40B4-BE49-F238E27FC236}">
-                <a16:creationId xmlns:a16="http://schemas.microsoft.com/office/drawing/2014/main" id="{345F3B9A-F3D5-48D3-8B28-B84BE7B5493D}"/>
+                <a16:creationId xmlns:a16="http://schemas.microsoft.com/office/drawing/2014/main" id="{19FEF0F2-5113-4BD2-940C-EF27D6419AF5}"/>
               </a:ext>
             </a:extLst>
           </p:cNvPr>
@@ -9357,7 +9357,7 @@
           <p:cNvPr id="18" name="">
             <a:extLst xmlns:a="http://schemas.openxmlformats.org/drawingml/2006/main">
               <a:ext uri="{FF2B5EF4-FFF2-40B4-BE49-F238E27FC236}">
-                <a16:creationId xmlns:a16="http://schemas.microsoft.com/office/drawing/2014/main" id="{0B1569E0-6A6D-4C22-AEB4-51A73C40A7F4}"/>
+                <a16:creationId xmlns:a16="http://schemas.microsoft.com/office/drawing/2014/main" id="{5E555FC3-78FF-4E37-B17A-8682F7E262B7}"/>
               </a:ext>
             </a:extLst>
           </p:cNvPr>
@@ -9390,7 +9390,7 @@
           <p:cNvPr id="19" name="">
             <a:extLst xmlns:a="http://schemas.openxmlformats.org/drawingml/2006/main">
               <a:ext uri="{FF2B5EF4-FFF2-40B4-BE49-F238E27FC236}">
-                <a16:creationId xmlns:a16="http://schemas.microsoft.com/office/drawing/2014/main" id="{45D759A4-AF54-4329-9A96-D9D5E5E8390A}"/>
+                <a16:creationId xmlns:a16="http://schemas.microsoft.com/office/drawing/2014/main" id="{A97837E2-5031-4C07-BE9D-8A4C2597AB60}"/>
               </a:ext>
             </a:extLst>
           </p:cNvPr>
@@ -9425,7 +9425,7 @@
           <p:cNvPr id="20" name="">
             <a:extLst xmlns:a="http://schemas.openxmlformats.org/drawingml/2006/main">
               <a:ext uri="{FF2B5EF4-FFF2-40B4-BE49-F238E27FC236}">
-                <a16:creationId xmlns:a16="http://schemas.microsoft.com/office/drawing/2014/main" id="{A70F3C4D-F17E-4277-81CC-752C93DF7986}"/>
+                <a16:creationId xmlns:a16="http://schemas.microsoft.com/office/drawing/2014/main" id="{AFC001E8-2E51-4115-BE0C-45C0496C2035}"/>
               </a:ext>
             </a:extLst>
           </p:cNvPr>
@@ -9483,7 +9483,7 @@
           <p:cNvPr id="21" name="">
             <a:extLst xmlns:a="http://schemas.openxmlformats.org/drawingml/2006/main">
               <a:ext uri="{FF2B5EF4-FFF2-40B4-BE49-F238E27FC236}">
-                <a16:creationId xmlns:a16="http://schemas.microsoft.com/office/drawing/2014/main" id="{E00E03A8-64BC-4908-92FA-F50D5192D45D}"/>
+                <a16:creationId xmlns:a16="http://schemas.microsoft.com/office/drawing/2014/main" id="{7608E6E5-B22A-42E8-B665-5B47301E8C3E}"/>
               </a:ext>
             </a:extLst>
           </p:cNvPr>
@@ -9590,7 +9590,7 @@
     </p:spTree>
     <p:extLst>
       <p:ext uri="{BB962C8B-B14F-4D97-AF65-F5344CB8AC3E}">
-        <p14:creationId xmlns:p14="http://schemas.microsoft.com/office/powerpoint/2010/main" val="1948375520"/>
+        <p14:creationId xmlns:p14="http://schemas.microsoft.com/office/powerpoint/2010/main" val="214011943"/>
       </p:ext>
     </p:extLst>
   </p:cSld>
@@ -9603,7 +9603,7 @@
     <p:bg>
       <p:bgPr>
         <a:solidFill xmlns:a="http://schemas.openxmlformats.org/drawingml/2006/main">
-          <a:srgbClr val="0E1B3E"/>
+          <a:srgbClr val="070F26"/>
         </a:solidFill>
       </p:bgPr>
     </p:bg>
@@ -9621,7 +9621,7 @@
           <p:cNvPr id="1" name="">
             <a:extLst xmlns:a="http://schemas.openxmlformats.org/drawingml/2006/main">
               <a:ext uri="{FF2B5EF4-FFF2-40B4-BE49-F238E27FC236}">
-                <a16:creationId xmlns:a16="http://schemas.microsoft.com/office/drawing/2014/main" id="{0E2456CF-23A8-480C-A990-1B89B0FD33BE}"/>
+                <a16:creationId xmlns:a16="http://schemas.microsoft.com/office/drawing/2014/main" id="{153E8AAC-0935-481E-97C0-5320C66A16E4}"/>
               </a:ext>
             </a:extLst>
           </p:cNvPr>
@@ -9639,7 +9639,7 @@
             <a:avLst/>
           </a:prstGeom>
           <a:solidFill xmlns:a="http://schemas.openxmlformats.org/drawingml/2006/main">
-            <a:srgbClr val="0E1B3E"/>
+            <a:srgbClr val="070F26"/>
           </a:solidFill>
           <a:ln xmlns:a="http://schemas.openxmlformats.org/drawingml/2006/main" w="0">
             <a:solidFill>
@@ -9660,7 +9660,7 @@
           <p:nvPr/>
         </p:nvPicPr>
         <p:blipFill>
-          <a:blip xmlns:r="http://schemas.openxmlformats.org/officeDocument/2006/relationships" xmlns:a="http://schemas.openxmlformats.org/drawingml/2006/main" r:embed="R8942e2e8131841fe"/>
+          <a:blip xmlns:r="http://schemas.openxmlformats.org/officeDocument/2006/relationships" xmlns:a="http://schemas.openxmlformats.org/drawingml/2006/main" r:embed="R66d2f1ea71f34816"/>
           <a:stretch xmlns:a="http://schemas.openxmlformats.org/drawingml/2006/main"/>
         </p:blipFill>
         <p:spPr>
@@ -9678,7 +9678,7 @@
           <p:cNvPr id="3" name="">
             <a:extLst xmlns:a="http://schemas.openxmlformats.org/drawingml/2006/main">
               <a:ext uri="{FF2B5EF4-FFF2-40B4-BE49-F238E27FC236}">
-                <a16:creationId xmlns:a16="http://schemas.microsoft.com/office/drawing/2014/main" id="{9B3578E7-39E8-4C56-8542-712E103D5249}"/>
+                <a16:creationId xmlns:a16="http://schemas.microsoft.com/office/drawing/2014/main" id="{A08941AA-55C5-4326-8563-4ADA3E6ADC5A}"/>
               </a:ext>
             </a:extLst>
           </p:cNvPr>
@@ -9736,7 +9736,7 @@
           <p:cNvPr id="4" name="">
             <a:extLst xmlns:a="http://schemas.openxmlformats.org/drawingml/2006/main">
               <a:ext uri="{FF2B5EF4-FFF2-40B4-BE49-F238E27FC236}">
-                <a16:creationId xmlns:a16="http://schemas.microsoft.com/office/drawing/2014/main" id="{2D556C57-EF8E-442B-A0E0-2D9E6218FFF2}"/>
+                <a16:creationId xmlns:a16="http://schemas.microsoft.com/office/drawing/2014/main" id="{93E13994-2698-4F3E-A60A-8E07E08D6AD5}"/>
               </a:ext>
             </a:extLst>
           </p:cNvPr>
@@ -9794,7 +9794,7 @@
           <p:cNvPr id="5" name="">
             <a:extLst xmlns:a="http://schemas.openxmlformats.org/drawingml/2006/main">
               <a:ext uri="{FF2B5EF4-FFF2-40B4-BE49-F238E27FC236}">
-                <a16:creationId xmlns:a16="http://schemas.microsoft.com/office/drawing/2014/main" id="{74E43986-F709-4B7F-90F5-7FEDDBE97BFB}"/>
+                <a16:creationId xmlns:a16="http://schemas.microsoft.com/office/drawing/2014/main" id="{7F0FB3AB-11E0-4622-8106-490201A1C397}"/>
               </a:ext>
             </a:extLst>
           </p:cNvPr>
@@ -9852,7 +9852,7 @@
           <p:cNvPr id="6" name="">
             <a:extLst xmlns:a="http://schemas.openxmlformats.org/drawingml/2006/main">
               <a:ext uri="{FF2B5EF4-FFF2-40B4-BE49-F238E27FC236}">
-                <a16:creationId xmlns:a16="http://schemas.microsoft.com/office/drawing/2014/main" id="{D6FA6155-ABAA-40B2-9694-F24CBB12238A}"/>
+                <a16:creationId xmlns:a16="http://schemas.microsoft.com/office/drawing/2014/main" id="{880E83E3-9F58-4F12-8C52-1790E3A7A138}"/>
               </a:ext>
             </a:extLst>
           </p:cNvPr>
@@ -9914,13 +9914,13 @@
           <p:nvPr/>
         </p:nvPicPr>
         <p:blipFill>
-          <a:blip xmlns:r="http://schemas.openxmlformats.org/officeDocument/2006/relationships" xmlns:a="http://schemas.openxmlformats.org/drawingml/2006/main" r:embed="Rccd44621fd754dd2"/>
+          <a:blip xmlns:r="http://schemas.openxmlformats.org/officeDocument/2006/relationships" xmlns:a="http://schemas.openxmlformats.org/drawingml/2006/main" r:embed="Rf916a3f7a9d84109"/>
           <a:stretch xmlns:a="http://schemas.openxmlformats.org/drawingml/2006/main"/>
         </p:blipFill>
         <p:spPr>
           <a:xfrm xmlns:a="http://schemas.openxmlformats.org/drawingml/2006/main">
-            <a:off x="476250" y="1257300"/>
-            <a:ext cx="2667000" cy="4533900"/>
+            <a:off x="0" y="1746250"/>
+            <a:ext cx="2667000" cy="3556000"/>
           </a:xfrm>
           <a:prstGeom xmlns:a="http://schemas.openxmlformats.org/drawingml/2006/main" prst="rect">
             <a:avLst/>
@@ -9932,7 +9932,7 @@
           <p:cNvPr id="8" name="">
             <a:extLst xmlns:a="http://schemas.openxmlformats.org/drawingml/2006/main">
               <a:ext uri="{FF2B5EF4-FFF2-40B4-BE49-F238E27FC236}">
-                <a16:creationId xmlns:a16="http://schemas.microsoft.com/office/drawing/2014/main" id="{4394BBFD-8AB7-4731-89FC-DF6D44B8DA46}"/>
+                <a16:creationId xmlns:a16="http://schemas.microsoft.com/office/drawing/2014/main" id="{57991649-1DEC-4C3B-B052-00CFFBD5C938}"/>
               </a:ext>
             </a:extLst>
           </p:cNvPr>
@@ -9990,7 +9990,7 @@
           <p:cNvPr id="9" name="">
             <a:extLst xmlns:a="http://schemas.openxmlformats.org/drawingml/2006/main">
               <a:ext uri="{FF2B5EF4-FFF2-40B4-BE49-F238E27FC236}">
-                <a16:creationId xmlns:a16="http://schemas.microsoft.com/office/drawing/2014/main" id="{4150E262-5449-4919-BACB-CF144A5F9DF6}"/>
+                <a16:creationId xmlns:a16="http://schemas.microsoft.com/office/drawing/2014/main" id="{809C91C1-830C-4B2D-9A89-E2E0328DF2E4}"/>
               </a:ext>
             </a:extLst>
           </p:cNvPr>
@@ -10048,7 +10048,7 @@
           <p:cNvPr id="10" name="">
             <a:extLst xmlns:a="http://schemas.openxmlformats.org/drawingml/2006/main">
               <a:ext uri="{FF2B5EF4-FFF2-40B4-BE49-F238E27FC236}">
-                <a16:creationId xmlns:a16="http://schemas.microsoft.com/office/drawing/2014/main" id="{C9711055-40BD-4DA8-B6FA-2E409B3C403B}"/>
+                <a16:creationId xmlns:a16="http://schemas.microsoft.com/office/drawing/2014/main" id="{1F02431B-6B75-48A6-A1C7-8DC0F694FEF3}"/>
               </a:ext>
             </a:extLst>
           </p:cNvPr>
@@ -10104,7 +10104,7 @@
     </p:spTree>
     <p:extLst>
       <p:ext uri="{BB962C8B-B14F-4D97-AF65-F5344CB8AC3E}">
-        <p14:creationId xmlns:p14="http://schemas.microsoft.com/office/powerpoint/2010/main" val="900003336"/>
+        <p14:creationId xmlns:p14="http://schemas.microsoft.com/office/powerpoint/2010/main" val="1551488865"/>
       </p:ext>
     </p:extLst>
   </p:cSld>
@@ -10135,7 +10135,7 @@
           <p:cNvPr id="1" name="">
             <a:extLst xmlns:a="http://schemas.openxmlformats.org/drawingml/2006/main">
               <a:ext uri="{FF2B5EF4-FFF2-40B4-BE49-F238E27FC236}">
-                <a16:creationId xmlns:a16="http://schemas.microsoft.com/office/drawing/2014/main" id="{1814E4E2-3ED0-47E3-BC67-A1E54064F223}"/>
+                <a16:creationId xmlns:a16="http://schemas.microsoft.com/office/drawing/2014/main" id="{750294C1-A271-4560-9B29-0D5D74945EDC}"/>
               </a:ext>
             </a:extLst>
           </p:cNvPr>
@@ -10174,7 +10174,7 @@
           <p:nvPr/>
         </p:nvPicPr>
         <p:blipFill>
-          <a:blip xmlns:r="http://schemas.openxmlformats.org/officeDocument/2006/relationships" xmlns:a="http://schemas.openxmlformats.org/drawingml/2006/main" r:embed="Rb2f7606572804d52"/>
+          <a:blip xmlns:r="http://schemas.openxmlformats.org/officeDocument/2006/relationships" xmlns:a="http://schemas.openxmlformats.org/drawingml/2006/main" r:embed="R322a12a1afb14cea"/>
           <a:stretch xmlns:a="http://schemas.openxmlformats.org/drawingml/2006/main"/>
         </p:blipFill>
         <p:spPr>
@@ -10192,7 +10192,7 @@
           <p:cNvPr id="3" name="">
             <a:extLst xmlns:a="http://schemas.openxmlformats.org/drawingml/2006/main">
               <a:ext uri="{FF2B5EF4-FFF2-40B4-BE49-F238E27FC236}">
-                <a16:creationId xmlns:a16="http://schemas.microsoft.com/office/drawing/2014/main" id="{013586D6-5794-4C20-A1D1-6080F2B2521D}"/>
+                <a16:creationId xmlns:a16="http://schemas.microsoft.com/office/drawing/2014/main" id="{4B7DE3ED-A9A7-483F-9CE5-994F5C6FF591}"/>
               </a:ext>
             </a:extLst>
           </p:cNvPr>
@@ -10230,14 +10230,14 @@
             <a:pPr algn="r">
               <a:defRPr sz="825" b="1">
                 <a:solidFill>
-                  <a:srgbClr val="0E1B3E"/>
+                  <a:srgbClr val="070F26"/>
                 </a:solidFill>
               </a:defRPr>
             </a:pPr>
             <a:r>
               <a:rPr sz="825" b="1">
                 <a:solidFill>
-                  <a:srgbClr val="0E1B3E"/>
+                  <a:srgbClr val="070F26"/>
                 </a:solidFill>
               </a:rPr>
               <a:t>NTT DATA UNIVERSITY</a:t>
@@ -10250,7 +10250,7 @@
           <p:cNvPr id="4" name="">
             <a:extLst xmlns:a="http://schemas.openxmlformats.org/drawingml/2006/main">
               <a:ext uri="{FF2B5EF4-FFF2-40B4-BE49-F238E27FC236}">
-                <a16:creationId xmlns:a16="http://schemas.microsoft.com/office/drawing/2014/main" id="{0E2B2476-343B-47D3-909B-A6EE5C2B2541}"/>
+                <a16:creationId xmlns:a16="http://schemas.microsoft.com/office/drawing/2014/main" id="{7874BBCE-C70D-4362-8AAB-CCDE055783E5}"/>
               </a:ext>
             </a:extLst>
           </p:cNvPr>
@@ -10308,7 +10308,7 @@
           <p:cNvPr id="5" name="">
             <a:extLst xmlns:a="http://schemas.openxmlformats.org/drawingml/2006/main">
               <a:ext uri="{FF2B5EF4-FFF2-40B4-BE49-F238E27FC236}">
-                <a16:creationId xmlns:a16="http://schemas.microsoft.com/office/drawing/2014/main" id="{DB24BAEA-09F7-40AF-A77E-652D01F11E7D}"/>
+                <a16:creationId xmlns:a16="http://schemas.microsoft.com/office/drawing/2014/main" id="{F0AF53C8-243D-4DCA-B45D-558F71847034}"/>
               </a:ext>
             </a:extLst>
           </p:cNvPr>
@@ -10366,7 +10366,7 @@
           <p:cNvPr id="6" name="">
             <a:extLst xmlns:a="http://schemas.openxmlformats.org/drawingml/2006/main">
               <a:ext uri="{FF2B5EF4-FFF2-40B4-BE49-F238E27FC236}">
-                <a16:creationId xmlns:a16="http://schemas.microsoft.com/office/drawing/2014/main" id="{77C45B80-F4AA-4DE9-9309-6A422677C135}"/>
+                <a16:creationId xmlns:a16="http://schemas.microsoft.com/office/drawing/2014/main" id="{3A8D3E5C-4A13-4D10-94BE-213BB322D503}"/>
               </a:ext>
             </a:extLst>
           </p:cNvPr>
@@ -10404,14 +10404,14 @@
             <a:pPr algn="r">
               <a:defRPr sz="675" b="1">
                 <a:solidFill>
-                  <a:srgbClr val="0E1B3E"/>
+                  <a:srgbClr val="070F26"/>
                 </a:solidFill>
               </a:defRPr>
             </a:pPr>
             <a:r>
               <a:rPr sz="675" b="1">
                 <a:solidFill>
-                  <a:srgbClr val="0E1B3E"/>
+                  <a:srgbClr val="070F26"/>
                 </a:solidFill>
               </a:rPr>
               <a:t>NTT DATA UNIVERSITY</a:t>
@@ -10424,7 +10424,7 @@
           <p:cNvPr id="7" name="">
             <a:extLst xmlns:a="http://schemas.openxmlformats.org/drawingml/2006/main">
               <a:ext uri="{FF2B5EF4-FFF2-40B4-BE49-F238E27FC236}">
-                <a16:creationId xmlns:a16="http://schemas.microsoft.com/office/drawing/2014/main" id="{19EE35D8-0FC0-44D5-9DBE-87F3E47D790E}"/>
+                <a16:creationId xmlns:a16="http://schemas.microsoft.com/office/drawing/2014/main" id="{88804513-4E8F-4F78-B4CA-D0C87EBA5501}"/>
               </a:ext>
             </a:extLst>
           </p:cNvPr>
@@ -10482,7 +10482,7 @@
           <p:cNvPr id="8" name="">
             <a:extLst xmlns:a="http://schemas.openxmlformats.org/drawingml/2006/main">
               <a:ext uri="{FF2B5EF4-FFF2-40B4-BE49-F238E27FC236}">
-                <a16:creationId xmlns:a16="http://schemas.microsoft.com/office/drawing/2014/main" id="{7F9EEAB1-7B67-49F2-BE19-F3E3B715CA35}"/>
+                <a16:creationId xmlns:a16="http://schemas.microsoft.com/office/drawing/2014/main" id="{EC101391-EDAC-4891-AD15-868839C295CB}"/>
               </a:ext>
             </a:extLst>
           </p:cNvPr>
@@ -10520,14 +10520,14 @@
             <a:pPr algn="l">
               <a:defRPr sz="2400" b="0">
                 <a:solidFill>
-                  <a:srgbClr val="0E1B3E"/>
+                  <a:srgbClr val="070F26"/>
                 </a:solidFill>
               </a:defRPr>
             </a:pPr>
             <a:r>
               <a:rPr sz="2400" b="0">
                 <a:solidFill>
-                  <a:srgbClr val="0E1B3E"/>
+                  <a:srgbClr val="070F26"/>
                 </a:solidFill>
               </a:rPr>
               <a:t>Extrair → Transformar → Carregar</a:t>
@@ -10540,7 +10540,7 @@
           <p:cNvPr id="9" name="">
             <a:extLst xmlns:a="http://schemas.openxmlformats.org/drawingml/2006/main">
               <a:ext uri="{FF2B5EF4-FFF2-40B4-BE49-F238E27FC236}">
-                <a16:creationId xmlns:a16="http://schemas.microsoft.com/office/drawing/2014/main" id="{2E4BCE3C-92F5-4C68-A56E-FFAF0F87F52B}"/>
+                <a16:creationId xmlns:a16="http://schemas.microsoft.com/office/drawing/2014/main" id="{0607ADAE-7A9A-4EA1-ADE9-5EF4FC3E6358}"/>
               </a:ext>
             </a:extLst>
           </p:cNvPr>
@@ -10598,7 +10598,7 @@
           <p:cNvPr id="10" name="">
             <a:extLst xmlns:a="http://schemas.openxmlformats.org/drawingml/2006/main">
               <a:ext uri="{FF2B5EF4-FFF2-40B4-BE49-F238E27FC236}">
-                <a16:creationId xmlns:a16="http://schemas.microsoft.com/office/drawing/2014/main" id="{37CC29CD-E461-4EC3-AC52-B242B43DDB2C}"/>
+                <a16:creationId xmlns:a16="http://schemas.microsoft.com/office/drawing/2014/main" id="{7F313DDA-7FD9-4554-8470-F75F49548D21}"/>
               </a:ext>
             </a:extLst>
           </p:cNvPr>
@@ -10631,7 +10631,7 @@
           <p:cNvPr id="11" name="">
             <a:extLst xmlns:a="http://schemas.openxmlformats.org/drawingml/2006/main">
               <a:ext uri="{FF2B5EF4-FFF2-40B4-BE49-F238E27FC236}">
-                <a16:creationId xmlns:a16="http://schemas.microsoft.com/office/drawing/2014/main" id="{4A4DD0AB-CA02-4D24-8B87-F886F410C25C}"/>
+                <a16:creationId xmlns:a16="http://schemas.microsoft.com/office/drawing/2014/main" id="{5DC39D5F-E0A3-4416-AFF1-4D5E8E6FC754}"/>
               </a:ext>
             </a:extLst>
           </p:cNvPr>
@@ -10666,7 +10666,7 @@
           <p:cNvPr id="12" name="">
             <a:extLst xmlns:a="http://schemas.openxmlformats.org/drawingml/2006/main">
               <a:ext uri="{FF2B5EF4-FFF2-40B4-BE49-F238E27FC236}">
-                <a16:creationId xmlns:a16="http://schemas.microsoft.com/office/drawing/2014/main" id="{AC122C6B-22BB-440F-BE9D-784E6E78B5DC}"/>
+                <a16:creationId xmlns:a16="http://schemas.microsoft.com/office/drawing/2014/main" id="{32AEE75D-D583-4B56-B4F2-D7767C7841D0}"/>
               </a:ext>
             </a:extLst>
           </p:cNvPr>
@@ -10724,7 +10724,7 @@
           <p:cNvPr id="13" name="">
             <a:extLst xmlns:a="http://schemas.openxmlformats.org/drawingml/2006/main">
               <a:ext uri="{FF2B5EF4-FFF2-40B4-BE49-F238E27FC236}">
-                <a16:creationId xmlns:a16="http://schemas.microsoft.com/office/drawing/2014/main" id="{DAEE0A6B-1EF4-4DB9-92C5-1EB732DEA2A1}"/>
+                <a16:creationId xmlns:a16="http://schemas.microsoft.com/office/drawing/2014/main" id="{580BE293-5E34-40D5-9C26-EA6E8F4A2365}"/>
               </a:ext>
             </a:extLst>
           </p:cNvPr>
@@ -10972,7 +10972,7 @@
           <p:cNvPr id="14" name="">
             <a:extLst xmlns:a="http://schemas.openxmlformats.org/drawingml/2006/main">
               <a:ext uri="{FF2B5EF4-FFF2-40B4-BE49-F238E27FC236}">
-                <a16:creationId xmlns:a16="http://schemas.microsoft.com/office/drawing/2014/main" id="{25737758-FBCF-46AC-95C5-D8FC33B355D3}"/>
+                <a16:creationId xmlns:a16="http://schemas.microsoft.com/office/drawing/2014/main" id="{A4A94598-BD8B-4B73-8662-4375BF2176D7}"/>
               </a:ext>
             </a:extLst>
           </p:cNvPr>
@@ -11005,7 +11005,7 @@
           <p:cNvPr id="15" name="">
             <a:extLst xmlns:a="http://schemas.openxmlformats.org/drawingml/2006/main">
               <a:ext uri="{FF2B5EF4-FFF2-40B4-BE49-F238E27FC236}">
-                <a16:creationId xmlns:a16="http://schemas.microsoft.com/office/drawing/2014/main" id="{3DA722EC-A03A-4868-8ADF-C1E0368F9081}"/>
+                <a16:creationId xmlns:a16="http://schemas.microsoft.com/office/drawing/2014/main" id="{D4320B09-F8F3-48C4-8DDE-3A8C5E506146}"/>
               </a:ext>
             </a:extLst>
           </p:cNvPr>
@@ -11040,7 +11040,7 @@
           <p:cNvPr id="16" name="">
             <a:extLst xmlns:a="http://schemas.openxmlformats.org/drawingml/2006/main">
               <a:ext uri="{FF2B5EF4-FFF2-40B4-BE49-F238E27FC236}">
-                <a16:creationId xmlns:a16="http://schemas.microsoft.com/office/drawing/2014/main" id="{BA47F755-8FC9-4512-A01C-76FCEAD0786B}"/>
+                <a16:creationId xmlns:a16="http://schemas.microsoft.com/office/drawing/2014/main" id="{A794787E-DF5F-40F7-BECA-DBF6FDBA9C89}"/>
               </a:ext>
             </a:extLst>
           </p:cNvPr>
@@ -11098,7 +11098,7 @@
           <p:cNvPr id="17" name="">
             <a:extLst xmlns:a="http://schemas.openxmlformats.org/drawingml/2006/main">
               <a:ext uri="{FF2B5EF4-FFF2-40B4-BE49-F238E27FC236}">
-                <a16:creationId xmlns:a16="http://schemas.microsoft.com/office/drawing/2014/main" id="{105DBCB4-A841-4876-8D39-0AAFE1971651}"/>
+                <a16:creationId xmlns:a16="http://schemas.microsoft.com/office/drawing/2014/main" id="{5F1197BD-7C32-4478-8BD7-ACBA9B3BC391}"/>
               </a:ext>
             </a:extLst>
           </p:cNvPr>
@@ -11300,7 +11300,7 @@
     </p:spTree>
     <p:extLst>
       <p:ext uri="{BB962C8B-B14F-4D97-AF65-F5344CB8AC3E}">
-        <p14:creationId xmlns:p14="http://schemas.microsoft.com/office/powerpoint/2010/main" val="1145574155"/>
+        <p14:creationId xmlns:p14="http://schemas.microsoft.com/office/powerpoint/2010/main" val="1524899604"/>
       </p:ext>
     </p:extLst>
   </p:cSld>
@@ -11313,7 +11313,7 @@
     <p:bg>
       <p:bgPr>
         <a:solidFill xmlns:a="http://schemas.openxmlformats.org/drawingml/2006/main">
-          <a:srgbClr val="0E1B3E"/>
+          <a:srgbClr val="070F26"/>
         </a:solidFill>
       </p:bgPr>
     </p:bg>
@@ -11331,7 +11331,7 @@
           <p:cNvPr id="1" name="">
             <a:extLst xmlns:a="http://schemas.openxmlformats.org/drawingml/2006/main">
               <a:ext uri="{FF2B5EF4-FFF2-40B4-BE49-F238E27FC236}">
-                <a16:creationId xmlns:a16="http://schemas.microsoft.com/office/drawing/2014/main" id="{117BDCB2-5DAB-4564-B592-95DFD488ABB4}"/>
+                <a16:creationId xmlns:a16="http://schemas.microsoft.com/office/drawing/2014/main" id="{B86779E1-A92D-4D13-B60C-F0F499D4AF10}"/>
               </a:ext>
             </a:extLst>
           </p:cNvPr>
@@ -11349,7 +11349,7 @@
             <a:avLst/>
           </a:prstGeom>
           <a:solidFill xmlns:a="http://schemas.openxmlformats.org/drawingml/2006/main">
-            <a:srgbClr val="0E1B3E"/>
+            <a:srgbClr val="070F26"/>
           </a:solidFill>
           <a:ln xmlns:a="http://schemas.openxmlformats.org/drawingml/2006/main" w="0">
             <a:solidFill>
@@ -11370,7 +11370,7 @@
           <p:nvPr/>
         </p:nvPicPr>
         <p:blipFill>
-          <a:blip xmlns:r="http://schemas.openxmlformats.org/officeDocument/2006/relationships" xmlns:a="http://schemas.openxmlformats.org/drawingml/2006/main" r:embed="R780ec8b32d5d4e09"/>
+          <a:blip xmlns:r="http://schemas.openxmlformats.org/officeDocument/2006/relationships" xmlns:a="http://schemas.openxmlformats.org/drawingml/2006/main" r:embed="R0bf8ef2548864497"/>
           <a:stretch xmlns:a="http://schemas.openxmlformats.org/drawingml/2006/main"/>
         </p:blipFill>
         <p:spPr>
@@ -11388,7 +11388,7 @@
           <p:cNvPr id="3" name="">
             <a:extLst xmlns:a="http://schemas.openxmlformats.org/drawingml/2006/main">
               <a:ext uri="{FF2B5EF4-FFF2-40B4-BE49-F238E27FC236}">
-                <a16:creationId xmlns:a16="http://schemas.microsoft.com/office/drawing/2014/main" id="{B88C1000-82FC-41B2-86EB-99A550DB7EC1}"/>
+                <a16:creationId xmlns:a16="http://schemas.microsoft.com/office/drawing/2014/main" id="{9FD0C9E9-155C-42FC-9F0A-0BA2622345D3}"/>
               </a:ext>
             </a:extLst>
           </p:cNvPr>
@@ -11446,7 +11446,7 @@
           <p:cNvPr id="4" name="">
             <a:extLst xmlns:a="http://schemas.openxmlformats.org/drawingml/2006/main">
               <a:ext uri="{FF2B5EF4-FFF2-40B4-BE49-F238E27FC236}">
-                <a16:creationId xmlns:a16="http://schemas.microsoft.com/office/drawing/2014/main" id="{3C2929A7-2AA9-4682-A157-2DF59970668D}"/>
+                <a16:creationId xmlns:a16="http://schemas.microsoft.com/office/drawing/2014/main" id="{C56F9D50-4D07-457B-865D-9AD541D96EFF}"/>
               </a:ext>
             </a:extLst>
           </p:cNvPr>
@@ -11504,7 +11504,7 @@
           <p:cNvPr id="5" name="">
             <a:extLst xmlns:a="http://schemas.openxmlformats.org/drawingml/2006/main">
               <a:ext uri="{FF2B5EF4-FFF2-40B4-BE49-F238E27FC236}">
-                <a16:creationId xmlns:a16="http://schemas.microsoft.com/office/drawing/2014/main" id="{C52849E1-1BAE-4D85-A891-553CB01669CA}"/>
+                <a16:creationId xmlns:a16="http://schemas.microsoft.com/office/drawing/2014/main" id="{123D18DB-E7AB-48E8-A9D3-7AAC456002B3}"/>
               </a:ext>
             </a:extLst>
           </p:cNvPr>
@@ -11562,7 +11562,7 @@
           <p:cNvPr id="6" name="">
             <a:extLst xmlns:a="http://schemas.openxmlformats.org/drawingml/2006/main">
               <a:ext uri="{FF2B5EF4-FFF2-40B4-BE49-F238E27FC236}">
-                <a16:creationId xmlns:a16="http://schemas.microsoft.com/office/drawing/2014/main" id="{51004CAF-BDFB-44E7-AEB4-0CC6B1A12289}"/>
+                <a16:creationId xmlns:a16="http://schemas.microsoft.com/office/drawing/2014/main" id="{8765851A-8913-4C83-856E-EB86477A6D4B}"/>
               </a:ext>
             </a:extLst>
           </p:cNvPr>
@@ -11624,13 +11624,13 @@
           <p:nvPr/>
         </p:nvPicPr>
         <p:blipFill>
-          <a:blip xmlns:r="http://schemas.openxmlformats.org/officeDocument/2006/relationships" xmlns:a="http://schemas.openxmlformats.org/drawingml/2006/main" r:embed="R3ab200886b734904"/>
+          <a:blip xmlns:r="http://schemas.openxmlformats.org/officeDocument/2006/relationships" xmlns:a="http://schemas.openxmlformats.org/drawingml/2006/main" r:embed="R5dd2499a983640e8"/>
           <a:stretch xmlns:a="http://schemas.openxmlformats.org/drawingml/2006/main"/>
         </p:blipFill>
         <p:spPr>
           <a:xfrm xmlns:a="http://schemas.openxmlformats.org/drawingml/2006/main">
-            <a:off x="476250" y="1257300"/>
-            <a:ext cx="2667000" cy="4533900"/>
+            <a:off x="0" y="1746250"/>
+            <a:ext cx="2667000" cy="3556000"/>
           </a:xfrm>
           <a:prstGeom xmlns:a="http://schemas.openxmlformats.org/drawingml/2006/main" prst="rect">
             <a:avLst/>
@@ -11642,7 +11642,7 @@
           <p:cNvPr id="8" name="">
             <a:extLst xmlns:a="http://schemas.openxmlformats.org/drawingml/2006/main">
               <a:ext uri="{FF2B5EF4-FFF2-40B4-BE49-F238E27FC236}">
-                <a16:creationId xmlns:a16="http://schemas.microsoft.com/office/drawing/2014/main" id="{98C29F51-DFFB-4083-9C8C-E7DD417251EC}"/>
+                <a16:creationId xmlns:a16="http://schemas.microsoft.com/office/drawing/2014/main" id="{0623BD49-9D91-46BB-8A88-45A1241D27EB}"/>
               </a:ext>
             </a:extLst>
           </p:cNvPr>
@@ -11700,7 +11700,7 @@
           <p:cNvPr id="9" name="">
             <a:extLst xmlns:a="http://schemas.openxmlformats.org/drawingml/2006/main">
               <a:ext uri="{FF2B5EF4-FFF2-40B4-BE49-F238E27FC236}">
-                <a16:creationId xmlns:a16="http://schemas.microsoft.com/office/drawing/2014/main" id="{EB09CC23-4CD3-4D36-8861-CFBA98BF44A5}"/>
+                <a16:creationId xmlns:a16="http://schemas.microsoft.com/office/drawing/2014/main" id="{38FE95EA-31B4-485A-B32D-75432B9AD276}"/>
               </a:ext>
             </a:extLst>
           </p:cNvPr>
@@ -11758,7 +11758,7 @@
           <p:cNvPr id="10" name="">
             <a:extLst xmlns:a="http://schemas.openxmlformats.org/drawingml/2006/main">
               <a:ext uri="{FF2B5EF4-FFF2-40B4-BE49-F238E27FC236}">
-                <a16:creationId xmlns:a16="http://schemas.microsoft.com/office/drawing/2014/main" id="{C3A7F62A-A942-4582-821D-E1ED8EF98DDD}"/>
+                <a16:creationId xmlns:a16="http://schemas.microsoft.com/office/drawing/2014/main" id="{05F73D3A-01D9-4C86-A52C-48787E7FBAA0}"/>
               </a:ext>
             </a:extLst>
           </p:cNvPr>
@@ -11814,7 +11814,7 @@
     </p:spTree>
     <p:extLst>
       <p:ext uri="{BB962C8B-B14F-4D97-AF65-F5344CB8AC3E}">
-        <p14:creationId xmlns:p14="http://schemas.microsoft.com/office/powerpoint/2010/main" val="1210531187"/>
+        <p14:creationId xmlns:p14="http://schemas.microsoft.com/office/powerpoint/2010/main" val="1384408743"/>
       </p:ext>
     </p:extLst>
   </p:cSld>
@@ -11845,7 +11845,7 @@
           <p:cNvPr id="1" name="">
             <a:extLst xmlns:a="http://schemas.openxmlformats.org/drawingml/2006/main">
               <a:ext uri="{FF2B5EF4-FFF2-40B4-BE49-F238E27FC236}">
-                <a16:creationId xmlns:a16="http://schemas.microsoft.com/office/drawing/2014/main" id="{8244A85E-59DC-4894-898A-36A2C338239B}"/>
+                <a16:creationId xmlns:a16="http://schemas.microsoft.com/office/drawing/2014/main" id="{E1377669-1980-427E-8A92-1AC46892FD70}"/>
               </a:ext>
             </a:extLst>
           </p:cNvPr>
@@ -11884,7 +11884,7 @@
           <p:nvPr/>
         </p:nvPicPr>
         <p:blipFill>
-          <a:blip xmlns:r="http://schemas.openxmlformats.org/officeDocument/2006/relationships" xmlns:a="http://schemas.openxmlformats.org/drawingml/2006/main" r:embed="Rbc220efedb9a4ac2"/>
+          <a:blip xmlns:r="http://schemas.openxmlformats.org/officeDocument/2006/relationships" xmlns:a="http://schemas.openxmlformats.org/drawingml/2006/main" r:embed="R783a371a6ea9479c"/>
           <a:stretch xmlns:a="http://schemas.openxmlformats.org/drawingml/2006/main"/>
         </p:blipFill>
         <p:spPr>
@@ -11902,7 +11902,7 @@
           <p:cNvPr id="3" name="">
             <a:extLst xmlns:a="http://schemas.openxmlformats.org/drawingml/2006/main">
               <a:ext uri="{FF2B5EF4-FFF2-40B4-BE49-F238E27FC236}">
-                <a16:creationId xmlns:a16="http://schemas.microsoft.com/office/drawing/2014/main" id="{DAF153BB-3CED-4634-AE1D-0D0BB7F1DB58}"/>
+                <a16:creationId xmlns:a16="http://schemas.microsoft.com/office/drawing/2014/main" id="{4856F161-4CE4-4B18-8152-A680A8DB296A}"/>
               </a:ext>
             </a:extLst>
           </p:cNvPr>
@@ -11940,14 +11940,14 @@
             <a:pPr algn="r">
               <a:defRPr sz="825" b="1">
                 <a:solidFill>
-                  <a:srgbClr val="0E1B3E"/>
+                  <a:srgbClr val="070F26"/>
                 </a:solidFill>
               </a:defRPr>
             </a:pPr>
             <a:r>
               <a:rPr sz="825" b="1">
                 <a:solidFill>
-                  <a:srgbClr val="0E1B3E"/>
+                  <a:srgbClr val="070F26"/>
                 </a:solidFill>
               </a:rPr>
               <a:t>NTT DATA UNIVERSITY</a:t>
@@ -11960,7 +11960,7 @@
           <p:cNvPr id="4" name="">
             <a:extLst xmlns:a="http://schemas.openxmlformats.org/drawingml/2006/main">
               <a:ext uri="{FF2B5EF4-FFF2-40B4-BE49-F238E27FC236}">
-                <a16:creationId xmlns:a16="http://schemas.microsoft.com/office/drawing/2014/main" id="{B26CBEEF-9D69-41CE-8629-349199F8ECD0}"/>
+                <a16:creationId xmlns:a16="http://schemas.microsoft.com/office/drawing/2014/main" id="{336C061D-9FA3-44D8-BC39-25C148DCDA0F}"/>
               </a:ext>
             </a:extLst>
           </p:cNvPr>
@@ -12018,7 +12018,7 @@
           <p:cNvPr id="5" name="">
             <a:extLst xmlns:a="http://schemas.openxmlformats.org/drawingml/2006/main">
               <a:ext uri="{FF2B5EF4-FFF2-40B4-BE49-F238E27FC236}">
-                <a16:creationId xmlns:a16="http://schemas.microsoft.com/office/drawing/2014/main" id="{F55398BF-6268-4D94-876E-99B5F5A72AA8}"/>
+                <a16:creationId xmlns:a16="http://schemas.microsoft.com/office/drawing/2014/main" id="{2AAD3F5C-3075-4559-8FA0-92E8DE949703}"/>
               </a:ext>
             </a:extLst>
           </p:cNvPr>
@@ -12076,7 +12076,7 @@
           <p:cNvPr id="6" name="">
             <a:extLst xmlns:a="http://schemas.openxmlformats.org/drawingml/2006/main">
               <a:ext uri="{FF2B5EF4-FFF2-40B4-BE49-F238E27FC236}">
-                <a16:creationId xmlns:a16="http://schemas.microsoft.com/office/drawing/2014/main" id="{9B0E50CF-9E3C-46ED-83BF-DFA19171C13D}"/>
+                <a16:creationId xmlns:a16="http://schemas.microsoft.com/office/drawing/2014/main" id="{94D45CDB-AC2D-47B2-8858-8E94FFC056BA}"/>
               </a:ext>
             </a:extLst>
           </p:cNvPr>
@@ -12114,14 +12114,14 @@
             <a:pPr algn="r">
               <a:defRPr sz="675" b="1">
                 <a:solidFill>
-                  <a:srgbClr val="0E1B3E"/>
+                  <a:srgbClr val="070F26"/>
                 </a:solidFill>
               </a:defRPr>
             </a:pPr>
             <a:r>
               <a:rPr sz="675" b="1">
                 <a:solidFill>
-                  <a:srgbClr val="0E1B3E"/>
+                  <a:srgbClr val="070F26"/>
                 </a:solidFill>
               </a:rPr>
               <a:t>NTT DATA UNIVERSITY</a:t>
@@ -12134,7 +12134,7 @@
           <p:cNvPr id="7" name="">
             <a:extLst xmlns:a="http://schemas.openxmlformats.org/drawingml/2006/main">
               <a:ext uri="{FF2B5EF4-FFF2-40B4-BE49-F238E27FC236}">
-                <a16:creationId xmlns:a16="http://schemas.microsoft.com/office/drawing/2014/main" id="{88F67602-F922-47E1-9A52-3A5F66C71147}"/>
+                <a16:creationId xmlns:a16="http://schemas.microsoft.com/office/drawing/2014/main" id="{5EB93E22-9DB7-4883-B224-55908CF9C34C}"/>
               </a:ext>
             </a:extLst>
           </p:cNvPr>
@@ -12192,7 +12192,7 @@
           <p:cNvPr id="8" name="">
             <a:extLst xmlns:a="http://schemas.openxmlformats.org/drawingml/2006/main">
               <a:ext uri="{FF2B5EF4-FFF2-40B4-BE49-F238E27FC236}">
-                <a16:creationId xmlns:a16="http://schemas.microsoft.com/office/drawing/2014/main" id="{28BE9EF8-39E2-44B2-9F1E-43F4DCCE34E9}"/>
+                <a16:creationId xmlns:a16="http://schemas.microsoft.com/office/drawing/2014/main" id="{80F801A5-D7AD-427D-8CD9-7A7FCCB46ADA}"/>
               </a:ext>
             </a:extLst>
           </p:cNvPr>
@@ -12230,14 +12230,14 @@
             <a:pPr algn="l">
               <a:defRPr sz="2400" b="0">
                 <a:solidFill>
-                  <a:srgbClr val="0E1B3E"/>
+                  <a:srgbClr val="070F26"/>
                 </a:solidFill>
               </a:defRPr>
             </a:pPr>
             <a:r>
               <a:rPr sz="2400" b="0">
                 <a:solidFill>
-                  <a:srgbClr val="0E1B3E"/>
+                  <a:srgbClr val="070F26"/>
                 </a:solidFill>
               </a:rPr>
               <a:t>Cada dupla em ~7 minutos</a:t>
@@ -12250,7 +12250,7 @@
           <p:cNvPr id="9" name="">
             <a:extLst xmlns:a="http://schemas.openxmlformats.org/drawingml/2006/main">
               <a:ext uri="{FF2B5EF4-FFF2-40B4-BE49-F238E27FC236}">
-                <a16:creationId xmlns:a16="http://schemas.microsoft.com/office/drawing/2014/main" id="{7BE2F3AA-E129-4198-8C94-408EA994DD80}"/>
+                <a16:creationId xmlns:a16="http://schemas.microsoft.com/office/drawing/2014/main" id="{E95A41E0-1CCD-4950-ADC0-8ED141228034}"/>
               </a:ext>
             </a:extLst>
           </p:cNvPr>
@@ -12308,7 +12308,7 @@
           <p:cNvPr id="10" name="">
             <a:extLst xmlns:a="http://schemas.openxmlformats.org/drawingml/2006/main">
               <a:ext uri="{FF2B5EF4-FFF2-40B4-BE49-F238E27FC236}">
-                <a16:creationId xmlns:a16="http://schemas.microsoft.com/office/drawing/2014/main" id="{157E1E19-4797-4508-A14A-AFDA228C1052}"/>
+                <a16:creationId xmlns:a16="http://schemas.microsoft.com/office/drawing/2014/main" id="{4C7F2618-9F10-46D2-AE43-5B0DB35F2D49}"/>
               </a:ext>
             </a:extLst>
           </p:cNvPr>
@@ -12341,7 +12341,7 @@
           <p:cNvPr id="11" name="">
             <a:extLst xmlns:a="http://schemas.openxmlformats.org/drawingml/2006/main">
               <a:ext uri="{FF2B5EF4-FFF2-40B4-BE49-F238E27FC236}">
-                <a16:creationId xmlns:a16="http://schemas.microsoft.com/office/drawing/2014/main" id="{9DBD2C37-8D91-4385-B353-7D2B561B069B}"/>
+                <a16:creationId xmlns:a16="http://schemas.microsoft.com/office/drawing/2014/main" id="{3D41672D-1E7A-4410-8CE3-0B7775AE54CF}"/>
               </a:ext>
             </a:extLst>
           </p:cNvPr>
@@ -12376,7 +12376,7 @@
           <p:cNvPr id="12" name="">
             <a:extLst xmlns:a="http://schemas.openxmlformats.org/drawingml/2006/main">
               <a:ext uri="{FF2B5EF4-FFF2-40B4-BE49-F238E27FC236}">
-                <a16:creationId xmlns:a16="http://schemas.microsoft.com/office/drawing/2014/main" id="{85C4DDFF-9FC1-4BCD-A770-CC7A894F5221}"/>
+                <a16:creationId xmlns:a16="http://schemas.microsoft.com/office/drawing/2014/main" id="{9457488F-8FAC-449F-8EF1-965F3F426967}"/>
               </a:ext>
             </a:extLst>
           </p:cNvPr>
@@ -12434,7 +12434,7 @@
           <p:cNvPr id="13" name="">
             <a:extLst xmlns:a="http://schemas.openxmlformats.org/drawingml/2006/main">
               <a:ext uri="{FF2B5EF4-FFF2-40B4-BE49-F238E27FC236}">
-                <a16:creationId xmlns:a16="http://schemas.microsoft.com/office/drawing/2014/main" id="{73AB16ED-00B1-4E8D-A472-B553844D19B7}"/>
+                <a16:creationId xmlns:a16="http://schemas.microsoft.com/office/drawing/2014/main" id="{09DAC018-7758-4E54-9318-2904B0495BD6}"/>
               </a:ext>
             </a:extLst>
           </p:cNvPr>
@@ -12472,14 +12472,14 @@
             <a:pPr algn="l">
               <a:defRPr sz="1050" b="1">
                 <a:solidFill>
-                  <a:srgbClr val="0E1B3E"/>
+                  <a:srgbClr val="070F26"/>
                 </a:solidFill>
               </a:defRPr>
             </a:pPr>
             <a:r>
               <a:rPr sz="1050" b="1">
                 <a:solidFill>
-                  <a:srgbClr val="0E1B3E"/>
+                  <a:srgbClr val="070F26"/>
                 </a:solidFill>
               </a:rPr>
               <a:t>Mostrar</a:t>
@@ -12492,7 +12492,7 @@
           <p:cNvPr id="14" name="">
             <a:extLst xmlns:a="http://schemas.openxmlformats.org/drawingml/2006/main">
               <a:ext uri="{FF2B5EF4-FFF2-40B4-BE49-F238E27FC236}">
-                <a16:creationId xmlns:a16="http://schemas.microsoft.com/office/drawing/2014/main" id="{0283C842-E5ED-496A-8922-649E5223DD34}"/>
+                <a16:creationId xmlns:a16="http://schemas.microsoft.com/office/drawing/2014/main" id="{B09FBEAB-5548-4E37-A9A0-88CF3499BB69}"/>
               </a:ext>
             </a:extLst>
           </p:cNvPr>
@@ -12584,7 +12584,7 @@
           <p:cNvPr id="15" name="">
             <a:extLst xmlns:a="http://schemas.openxmlformats.org/drawingml/2006/main">
               <a:ext uri="{FF2B5EF4-FFF2-40B4-BE49-F238E27FC236}">
-                <a16:creationId xmlns:a16="http://schemas.microsoft.com/office/drawing/2014/main" id="{19117D21-782F-4C55-9623-AB1155E90188}"/>
+                <a16:creationId xmlns:a16="http://schemas.microsoft.com/office/drawing/2014/main" id="{E94431E8-1F16-4EF2-AB19-69DB3151A737}"/>
               </a:ext>
             </a:extLst>
           </p:cNvPr>
@@ -12617,7 +12617,7 @@
           <p:cNvPr id="16" name="">
             <a:extLst xmlns:a="http://schemas.openxmlformats.org/drawingml/2006/main">
               <a:ext uri="{FF2B5EF4-FFF2-40B4-BE49-F238E27FC236}">
-                <a16:creationId xmlns:a16="http://schemas.microsoft.com/office/drawing/2014/main" id="{31E099AA-9108-4507-833C-B4AEB5AE87A2}"/>
+                <a16:creationId xmlns:a16="http://schemas.microsoft.com/office/drawing/2014/main" id="{E095048A-39A5-4EE1-8E48-085E6F20DC5B}"/>
               </a:ext>
             </a:extLst>
           </p:cNvPr>
@@ -12652,7 +12652,7 @@
           <p:cNvPr id="17" name="">
             <a:extLst xmlns:a="http://schemas.openxmlformats.org/drawingml/2006/main">
               <a:ext uri="{FF2B5EF4-FFF2-40B4-BE49-F238E27FC236}">
-                <a16:creationId xmlns:a16="http://schemas.microsoft.com/office/drawing/2014/main" id="{322C761D-FFF1-40FB-9122-0B7E7FAA974C}"/>
+                <a16:creationId xmlns:a16="http://schemas.microsoft.com/office/drawing/2014/main" id="{52347E71-D474-4E92-8B5A-09368896A2CF}"/>
               </a:ext>
             </a:extLst>
           </p:cNvPr>
@@ -12710,7 +12710,7 @@
           <p:cNvPr id="18" name="">
             <a:extLst xmlns:a="http://schemas.openxmlformats.org/drawingml/2006/main">
               <a:ext uri="{FF2B5EF4-FFF2-40B4-BE49-F238E27FC236}">
-                <a16:creationId xmlns:a16="http://schemas.microsoft.com/office/drawing/2014/main" id="{BA2EE3E5-74CE-4FF8-B1C7-20D8CBB4AAFB}"/>
+                <a16:creationId xmlns:a16="http://schemas.microsoft.com/office/drawing/2014/main" id="{7A9A673B-238A-4F95-9D94-DA5BFFB76A59}"/>
               </a:ext>
             </a:extLst>
           </p:cNvPr>
@@ -12748,14 +12748,14 @@
             <a:pPr algn="l">
               <a:defRPr sz="1050" b="1">
                 <a:solidFill>
-                  <a:srgbClr val="0E1B3E"/>
+                  <a:srgbClr val="070F26"/>
                 </a:solidFill>
               </a:defRPr>
             </a:pPr>
             <a:r>
               <a:rPr sz="1050" b="1">
                 <a:solidFill>
-                  <a:srgbClr val="0E1B3E"/>
+                  <a:srgbClr val="070F26"/>
                 </a:solidFill>
               </a:rPr>
               <a:t>Rodar</a:t>
@@ -12768,7 +12768,7 @@
           <p:cNvPr id="19" name="">
             <a:extLst xmlns:a="http://schemas.openxmlformats.org/drawingml/2006/main">
               <a:ext uri="{FF2B5EF4-FFF2-40B4-BE49-F238E27FC236}">
-                <a16:creationId xmlns:a16="http://schemas.microsoft.com/office/drawing/2014/main" id="{63A14DE2-D4D3-4D23-AFEC-183B63BF6F6D}"/>
+                <a16:creationId xmlns:a16="http://schemas.microsoft.com/office/drawing/2014/main" id="{E874E7DC-3B74-40C5-AEBA-E3CCF91A35BE}"/>
               </a:ext>
             </a:extLst>
           </p:cNvPr>
@@ -12860,7 +12860,7 @@
           <p:cNvPr id="20" name="">
             <a:extLst xmlns:a="http://schemas.openxmlformats.org/drawingml/2006/main">
               <a:ext uri="{FF2B5EF4-FFF2-40B4-BE49-F238E27FC236}">
-                <a16:creationId xmlns:a16="http://schemas.microsoft.com/office/drawing/2014/main" id="{85A283CC-7185-4D94-8ACB-13D86D8C0EDA}"/>
+                <a16:creationId xmlns:a16="http://schemas.microsoft.com/office/drawing/2014/main" id="{871776B8-699E-44B9-B9C6-DDFC926CA13F}"/>
               </a:ext>
             </a:extLst>
           </p:cNvPr>
@@ -12893,7 +12893,7 @@
           <p:cNvPr id="21" name="">
             <a:extLst xmlns:a="http://schemas.openxmlformats.org/drawingml/2006/main">
               <a:ext uri="{FF2B5EF4-FFF2-40B4-BE49-F238E27FC236}">
-                <a16:creationId xmlns:a16="http://schemas.microsoft.com/office/drawing/2014/main" id="{9D2E0063-0B44-4874-A5DF-F7B2C275252B}"/>
+                <a16:creationId xmlns:a16="http://schemas.microsoft.com/office/drawing/2014/main" id="{2E540A26-9FF8-4399-B6F5-1270267A9102}"/>
               </a:ext>
             </a:extLst>
           </p:cNvPr>
@@ -12928,7 +12928,7 @@
           <p:cNvPr id="22" name="">
             <a:extLst xmlns:a="http://schemas.openxmlformats.org/drawingml/2006/main">
               <a:ext uri="{FF2B5EF4-FFF2-40B4-BE49-F238E27FC236}">
-                <a16:creationId xmlns:a16="http://schemas.microsoft.com/office/drawing/2014/main" id="{0B944F6E-A26D-4A15-A875-4AAC38458BB3}"/>
+                <a16:creationId xmlns:a16="http://schemas.microsoft.com/office/drawing/2014/main" id="{C03C4643-287F-430E-BF28-E68AFD2FE886}"/>
               </a:ext>
             </a:extLst>
           </p:cNvPr>
@@ -12986,7 +12986,7 @@
           <p:cNvPr id="23" name="">
             <a:extLst xmlns:a="http://schemas.openxmlformats.org/drawingml/2006/main">
               <a:ext uri="{FF2B5EF4-FFF2-40B4-BE49-F238E27FC236}">
-                <a16:creationId xmlns:a16="http://schemas.microsoft.com/office/drawing/2014/main" id="{998150D6-732D-4447-A9CE-22AC589B3450}"/>
+                <a16:creationId xmlns:a16="http://schemas.microsoft.com/office/drawing/2014/main" id="{46C970AE-7B0B-495B-9855-6C0FAE5FB09B}"/>
               </a:ext>
             </a:extLst>
           </p:cNvPr>
@@ -13024,14 +13024,14 @@
             <a:pPr algn="l">
               <a:defRPr sz="1050" b="1">
                 <a:solidFill>
-                  <a:srgbClr val="0E1B3E"/>
+                  <a:srgbClr val="070F26"/>
                 </a:solidFill>
               </a:defRPr>
             </a:pPr>
             <a:r>
               <a:rPr sz="1050" b="1">
                 <a:solidFill>
-                  <a:srgbClr val="0E1B3E"/>
+                  <a:srgbClr val="070F26"/>
                 </a:solidFill>
               </a:rPr>
               <a:t>Discutir</a:t>
@@ -13044,7 +13044,7 @@
           <p:cNvPr id="24" name="">
             <a:extLst xmlns:a="http://schemas.openxmlformats.org/drawingml/2006/main">
               <a:ext uri="{FF2B5EF4-FFF2-40B4-BE49-F238E27FC236}">
-                <a16:creationId xmlns:a16="http://schemas.microsoft.com/office/drawing/2014/main" id="{367B2630-7EDB-44E7-9DFD-786B106C954E}"/>
+                <a16:creationId xmlns:a16="http://schemas.microsoft.com/office/drawing/2014/main" id="{BEC79134-E094-4828-8D8B-3FBF8A30FB97}"/>
               </a:ext>
             </a:extLst>
           </p:cNvPr>
@@ -13136,7 +13136,7 @@
           <p:cNvPr id="25" name="">
             <a:extLst xmlns:a="http://schemas.openxmlformats.org/drawingml/2006/main">
               <a:ext uri="{FF2B5EF4-FFF2-40B4-BE49-F238E27FC236}">
-                <a16:creationId xmlns:a16="http://schemas.microsoft.com/office/drawing/2014/main" id="{41F7E624-8EB5-4563-B8AE-E66897B6B755}"/>
+                <a16:creationId xmlns:a16="http://schemas.microsoft.com/office/drawing/2014/main" id="{35EF5C80-F57E-43AE-8FE3-0C92187CACA4}"/>
               </a:ext>
             </a:extLst>
           </p:cNvPr>
@@ -13169,7 +13169,7 @@
           <p:cNvPr id="26" name="">
             <a:extLst xmlns:a="http://schemas.openxmlformats.org/drawingml/2006/main">
               <a:ext uri="{FF2B5EF4-FFF2-40B4-BE49-F238E27FC236}">
-                <a16:creationId xmlns:a16="http://schemas.microsoft.com/office/drawing/2014/main" id="{0058F158-22B3-4E18-AA67-FB025ADEF200}"/>
+                <a16:creationId xmlns:a16="http://schemas.microsoft.com/office/drawing/2014/main" id="{D70675E7-2144-4182-93F2-8B83EBA62F19}"/>
               </a:ext>
             </a:extLst>
           </p:cNvPr>
@@ -13204,7 +13204,7 @@
           <p:cNvPr id="27" name="">
             <a:extLst xmlns:a="http://schemas.openxmlformats.org/drawingml/2006/main">
               <a:ext uri="{FF2B5EF4-FFF2-40B4-BE49-F238E27FC236}">
-                <a16:creationId xmlns:a16="http://schemas.microsoft.com/office/drawing/2014/main" id="{62E5BDD0-E36C-459D-A99F-B2C8C2DB3779}"/>
+                <a16:creationId xmlns:a16="http://schemas.microsoft.com/office/drawing/2014/main" id="{3068F152-5D82-47AF-8344-CE30277660C4}"/>
               </a:ext>
             </a:extLst>
           </p:cNvPr>
@@ -13262,7 +13262,7 @@
           <p:cNvPr id="28" name="">
             <a:extLst xmlns:a="http://schemas.openxmlformats.org/drawingml/2006/main">
               <a:ext uri="{FF2B5EF4-FFF2-40B4-BE49-F238E27FC236}">
-                <a16:creationId xmlns:a16="http://schemas.microsoft.com/office/drawing/2014/main" id="{FDC126BC-DBB1-4932-8BB0-EAA85977BD79}"/>
+                <a16:creationId xmlns:a16="http://schemas.microsoft.com/office/drawing/2014/main" id="{4C4FC375-570D-4B9B-91AA-CA09E2DDD5F8}"/>
               </a:ext>
             </a:extLst>
           </p:cNvPr>
@@ -13300,14 +13300,14 @@
             <a:pPr algn="l">
               <a:defRPr sz="1050" b="1">
                 <a:solidFill>
-                  <a:srgbClr val="0E1B3E"/>
+                  <a:srgbClr val="070F26"/>
                 </a:solidFill>
               </a:defRPr>
             </a:pPr>
             <a:r>
               <a:rPr sz="1050" b="1">
                 <a:solidFill>
-                  <a:srgbClr val="0E1B3E"/>
+                  <a:srgbClr val="070F26"/>
                 </a:solidFill>
               </a:rPr>
               <a:t>Comparar</a:t>
@@ -13320,7 +13320,7 @@
           <p:cNvPr id="29" name="">
             <a:extLst xmlns:a="http://schemas.openxmlformats.org/drawingml/2006/main">
               <a:ext uri="{FF2B5EF4-FFF2-40B4-BE49-F238E27FC236}">
-                <a16:creationId xmlns:a16="http://schemas.microsoft.com/office/drawing/2014/main" id="{168C837E-528F-46B1-95C1-A7013D42F321}"/>
+                <a16:creationId xmlns:a16="http://schemas.microsoft.com/office/drawing/2014/main" id="{4BAE295F-5F22-49B6-A558-F7C0CEE4FB7E}"/>
               </a:ext>
             </a:extLst>
           </p:cNvPr>
@@ -13410,7 +13410,7 @@
     </p:spTree>
     <p:extLst>
       <p:ext uri="{BB962C8B-B14F-4D97-AF65-F5344CB8AC3E}">
-        <p14:creationId xmlns:p14="http://schemas.microsoft.com/office/powerpoint/2010/main" val="449373229"/>
+        <p14:creationId xmlns:p14="http://schemas.microsoft.com/office/powerpoint/2010/main" val="1651780307"/>
       </p:ext>
     </p:extLst>
   </p:cSld>
@@ -13441,7 +13441,7 @@
           <p:cNvPr id="1" name="">
             <a:extLst xmlns:a="http://schemas.openxmlformats.org/drawingml/2006/main">
               <a:ext uri="{FF2B5EF4-FFF2-40B4-BE49-F238E27FC236}">
-                <a16:creationId xmlns:a16="http://schemas.microsoft.com/office/drawing/2014/main" id="{BC227F5F-A8D5-432E-939E-F4DCEC4EFB22}"/>
+                <a16:creationId xmlns:a16="http://schemas.microsoft.com/office/drawing/2014/main" id="{1632EFB4-3BC0-4372-A958-FDF7F958BE2C}"/>
               </a:ext>
             </a:extLst>
           </p:cNvPr>
@@ -13480,7 +13480,7 @@
           <p:nvPr/>
         </p:nvPicPr>
         <p:blipFill>
-          <a:blip xmlns:r="http://schemas.openxmlformats.org/officeDocument/2006/relationships" xmlns:a="http://schemas.openxmlformats.org/drawingml/2006/main" r:embed="Rd8bc2a8365b1498d"/>
+          <a:blip xmlns:r="http://schemas.openxmlformats.org/officeDocument/2006/relationships" xmlns:a="http://schemas.openxmlformats.org/drawingml/2006/main" r:embed="Ra7fe405090f04476"/>
           <a:stretch xmlns:a="http://schemas.openxmlformats.org/drawingml/2006/main"/>
         </p:blipFill>
         <p:spPr>
@@ -13498,7 +13498,7 @@
           <p:cNvPr id="3" name="">
             <a:extLst xmlns:a="http://schemas.openxmlformats.org/drawingml/2006/main">
               <a:ext uri="{FF2B5EF4-FFF2-40B4-BE49-F238E27FC236}">
-                <a16:creationId xmlns:a16="http://schemas.microsoft.com/office/drawing/2014/main" id="{FAF63061-4413-4DC0-989C-ABD049B1E183}"/>
+                <a16:creationId xmlns:a16="http://schemas.microsoft.com/office/drawing/2014/main" id="{6944F650-5C20-4C6D-8913-80C35FF89C07}"/>
               </a:ext>
             </a:extLst>
           </p:cNvPr>
@@ -13536,14 +13536,14 @@
             <a:pPr algn="r">
               <a:defRPr sz="825" b="1">
                 <a:solidFill>
-                  <a:srgbClr val="0E1B3E"/>
+                  <a:srgbClr val="070F26"/>
                 </a:solidFill>
               </a:defRPr>
             </a:pPr>
             <a:r>
               <a:rPr sz="825" b="1">
                 <a:solidFill>
-                  <a:srgbClr val="0E1B3E"/>
+                  <a:srgbClr val="070F26"/>
                 </a:solidFill>
               </a:rPr>
               <a:t>NTT DATA UNIVERSITY</a:t>
@@ -13556,7 +13556,7 @@
           <p:cNvPr id="4" name="">
             <a:extLst xmlns:a="http://schemas.openxmlformats.org/drawingml/2006/main">
               <a:ext uri="{FF2B5EF4-FFF2-40B4-BE49-F238E27FC236}">
-                <a16:creationId xmlns:a16="http://schemas.microsoft.com/office/drawing/2014/main" id="{CB8C69F2-0C28-4939-B3F5-753C5D05A1AD}"/>
+                <a16:creationId xmlns:a16="http://schemas.microsoft.com/office/drawing/2014/main" id="{6BFB620B-2502-4379-A8C5-F7462ADA6F40}"/>
               </a:ext>
             </a:extLst>
           </p:cNvPr>
@@ -13614,7 +13614,7 @@
           <p:cNvPr id="5" name="">
             <a:extLst xmlns:a="http://schemas.openxmlformats.org/drawingml/2006/main">
               <a:ext uri="{FF2B5EF4-FFF2-40B4-BE49-F238E27FC236}">
-                <a16:creationId xmlns:a16="http://schemas.microsoft.com/office/drawing/2014/main" id="{57AE9221-460B-400D-8EFD-7AC5F19CCFD7}"/>
+                <a16:creationId xmlns:a16="http://schemas.microsoft.com/office/drawing/2014/main" id="{3BAA73AE-0B43-4867-9FF1-7E9C98A7D4AF}"/>
               </a:ext>
             </a:extLst>
           </p:cNvPr>
@@ -13672,7 +13672,7 @@
           <p:cNvPr id="6" name="">
             <a:extLst xmlns:a="http://schemas.openxmlformats.org/drawingml/2006/main">
               <a:ext uri="{FF2B5EF4-FFF2-40B4-BE49-F238E27FC236}">
-                <a16:creationId xmlns:a16="http://schemas.microsoft.com/office/drawing/2014/main" id="{D4F52E81-0A18-4E52-9ECD-DBF96B8C389A}"/>
+                <a16:creationId xmlns:a16="http://schemas.microsoft.com/office/drawing/2014/main" id="{036A5022-C04B-4D39-9CBC-55631043C1FD}"/>
               </a:ext>
             </a:extLst>
           </p:cNvPr>
@@ -13710,14 +13710,14 @@
             <a:pPr algn="r">
               <a:defRPr sz="675" b="1">
                 <a:solidFill>
-                  <a:srgbClr val="0E1B3E"/>
+                  <a:srgbClr val="070F26"/>
                 </a:solidFill>
               </a:defRPr>
             </a:pPr>
             <a:r>
               <a:rPr sz="675" b="1">
                 <a:solidFill>
-                  <a:srgbClr val="0E1B3E"/>
+                  <a:srgbClr val="070F26"/>
                 </a:solidFill>
               </a:rPr>
               <a:t>NTT DATA UNIVERSITY</a:t>
@@ -13730,7 +13730,7 @@
           <p:cNvPr id="7" name="">
             <a:extLst xmlns:a="http://schemas.openxmlformats.org/drawingml/2006/main">
               <a:ext uri="{FF2B5EF4-FFF2-40B4-BE49-F238E27FC236}">
-                <a16:creationId xmlns:a16="http://schemas.microsoft.com/office/drawing/2014/main" id="{AC16EAB1-7B93-4144-BEB7-4BE86BAD762A}"/>
+                <a16:creationId xmlns:a16="http://schemas.microsoft.com/office/drawing/2014/main" id="{D5FC5FEC-D9A0-4F04-B35F-872D36F624AF}"/>
               </a:ext>
             </a:extLst>
           </p:cNvPr>
@@ -13788,7 +13788,7 @@
           <p:cNvPr id="8" name="">
             <a:extLst xmlns:a="http://schemas.openxmlformats.org/drawingml/2006/main">
               <a:ext uri="{FF2B5EF4-FFF2-40B4-BE49-F238E27FC236}">
-                <a16:creationId xmlns:a16="http://schemas.microsoft.com/office/drawing/2014/main" id="{481E4E6F-7757-411E-A866-E843E2746CF5}"/>
+                <a16:creationId xmlns:a16="http://schemas.microsoft.com/office/drawing/2014/main" id="{AA06AA48-7A46-486C-854A-68CD862F3C6F}"/>
               </a:ext>
             </a:extLst>
           </p:cNvPr>
@@ -13826,14 +13826,14 @@
             <a:pPr algn="l">
               <a:defRPr sz="2400" b="0">
                 <a:solidFill>
-                  <a:srgbClr val="0E1B3E"/>
+                  <a:srgbClr val="070F26"/>
                 </a:solidFill>
               </a:defRPr>
             </a:pPr>
             <a:r>
               <a:rPr sz="2400" b="0">
                 <a:solidFill>
-                  <a:srgbClr val="0E1B3E"/>
+                  <a:srgbClr val="070F26"/>
                 </a:solidFill>
               </a:rPr>
               <a:t>O que levantar após cada apresentação</a:t>
@@ -13846,7 +13846,7 @@
           <p:cNvPr id="9" name="">
             <a:extLst xmlns:a="http://schemas.openxmlformats.org/drawingml/2006/main">
               <a:ext uri="{FF2B5EF4-FFF2-40B4-BE49-F238E27FC236}">
-                <a16:creationId xmlns:a16="http://schemas.microsoft.com/office/drawing/2014/main" id="{D716760A-8361-48D4-B7E3-089B781703F6}"/>
+                <a16:creationId xmlns:a16="http://schemas.microsoft.com/office/drawing/2014/main" id="{DB158B2A-C7EC-44C2-A722-1AED03BE8C52}"/>
               </a:ext>
             </a:extLst>
           </p:cNvPr>
@@ -13904,7 +13904,7 @@
           <p:cNvPr id="10" name="">
             <a:extLst xmlns:a="http://schemas.openxmlformats.org/drawingml/2006/main">
               <a:ext uri="{FF2B5EF4-FFF2-40B4-BE49-F238E27FC236}">
-                <a16:creationId xmlns:a16="http://schemas.microsoft.com/office/drawing/2014/main" id="{AA6715E4-8332-42CE-8D91-4F5981D38B9C}"/>
+                <a16:creationId xmlns:a16="http://schemas.microsoft.com/office/drawing/2014/main" id="{DC3664D9-83A2-4FC7-AEDE-734F13042E84}"/>
               </a:ext>
             </a:extLst>
           </p:cNvPr>
@@ -13937,7 +13937,7 @@
           <p:cNvPr id="11" name="">
             <a:extLst xmlns:a="http://schemas.openxmlformats.org/drawingml/2006/main">
               <a:ext uri="{FF2B5EF4-FFF2-40B4-BE49-F238E27FC236}">
-                <a16:creationId xmlns:a16="http://schemas.microsoft.com/office/drawing/2014/main" id="{E204DBEF-9F7D-4F28-A5FD-9C28BCEC5DAA}"/>
+                <a16:creationId xmlns:a16="http://schemas.microsoft.com/office/drawing/2014/main" id="{13EAC4E2-0F9B-4515-A9D4-68E6E49DB985}"/>
               </a:ext>
             </a:extLst>
           </p:cNvPr>
@@ -13972,7 +13972,7 @@
           <p:cNvPr id="12" name="">
             <a:extLst xmlns:a="http://schemas.openxmlformats.org/drawingml/2006/main">
               <a:ext uri="{FF2B5EF4-FFF2-40B4-BE49-F238E27FC236}">
-                <a16:creationId xmlns:a16="http://schemas.microsoft.com/office/drawing/2014/main" id="{98D63FA4-CD10-4A5F-B73F-36FDC07DA5A2}"/>
+                <a16:creationId xmlns:a16="http://schemas.microsoft.com/office/drawing/2014/main" id="{34146F71-74B8-4C2C-B222-3C8BCB8FB0E3}"/>
               </a:ext>
             </a:extLst>
           </p:cNvPr>
@@ -14030,7 +14030,7 @@
           <p:cNvPr id="13" name="">
             <a:extLst xmlns:a="http://schemas.openxmlformats.org/drawingml/2006/main">
               <a:ext uri="{FF2B5EF4-FFF2-40B4-BE49-F238E27FC236}">
-                <a16:creationId xmlns:a16="http://schemas.microsoft.com/office/drawing/2014/main" id="{A0FCB18C-78DA-4CB9-A138-2958FD71C8BE}"/>
+                <a16:creationId xmlns:a16="http://schemas.microsoft.com/office/drawing/2014/main" id="{819690BE-50C1-46BA-B2A7-11D2AB645491}"/>
               </a:ext>
             </a:extLst>
           </p:cNvPr>
@@ -14139,7 +14139,7 @@
           <p:cNvPr id="14" name="">
             <a:extLst xmlns:a="http://schemas.openxmlformats.org/drawingml/2006/main">
               <a:ext uri="{FF2B5EF4-FFF2-40B4-BE49-F238E27FC236}">
-                <a16:creationId xmlns:a16="http://schemas.microsoft.com/office/drawing/2014/main" id="{9523D303-2379-4FD4-B4F2-CF971AB05B22}"/>
+                <a16:creationId xmlns:a16="http://schemas.microsoft.com/office/drawing/2014/main" id="{13F0F0DD-5BA8-4F6E-B3FC-E7169CF61F31}"/>
               </a:ext>
             </a:extLst>
           </p:cNvPr>
@@ -14172,7 +14172,7 @@
           <p:cNvPr id="15" name="">
             <a:extLst xmlns:a="http://schemas.openxmlformats.org/drawingml/2006/main">
               <a:ext uri="{FF2B5EF4-FFF2-40B4-BE49-F238E27FC236}">
-                <a16:creationId xmlns:a16="http://schemas.microsoft.com/office/drawing/2014/main" id="{AD5C1F6E-FFF2-4A10-A9E3-EB4627C69440}"/>
+                <a16:creationId xmlns:a16="http://schemas.microsoft.com/office/drawing/2014/main" id="{434F0741-7F44-4502-B888-B91C0499DFD9}"/>
               </a:ext>
             </a:extLst>
           </p:cNvPr>
@@ -14207,7 +14207,7 @@
           <p:cNvPr id="16" name="">
             <a:extLst xmlns:a="http://schemas.openxmlformats.org/drawingml/2006/main">
               <a:ext uri="{FF2B5EF4-FFF2-40B4-BE49-F238E27FC236}">
-                <a16:creationId xmlns:a16="http://schemas.microsoft.com/office/drawing/2014/main" id="{B3621097-D3A4-4634-A9DD-4358729A7F89}"/>
+                <a16:creationId xmlns:a16="http://schemas.microsoft.com/office/drawing/2014/main" id="{947C91BD-BDC7-4613-85FF-1FBA3F00EBC3}"/>
               </a:ext>
             </a:extLst>
           </p:cNvPr>
@@ -14265,7 +14265,7 @@
           <p:cNvPr id="17" name="">
             <a:extLst xmlns:a="http://schemas.openxmlformats.org/drawingml/2006/main">
               <a:ext uri="{FF2B5EF4-FFF2-40B4-BE49-F238E27FC236}">
-                <a16:creationId xmlns:a16="http://schemas.microsoft.com/office/drawing/2014/main" id="{4E2BA8EC-67FC-4156-9726-0D00E654CF81}"/>
+                <a16:creationId xmlns:a16="http://schemas.microsoft.com/office/drawing/2014/main" id="{EADE07BE-9F79-4ABA-B7CC-67CC1D81EC16}"/>
               </a:ext>
             </a:extLst>
           </p:cNvPr>
@@ -14374,7 +14374,7 @@
           <p:cNvPr id="18" name="">
             <a:extLst xmlns:a="http://schemas.openxmlformats.org/drawingml/2006/main">
               <a:ext uri="{FF2B5EF4-FFF2-40B4-BE49-F238E27FC236}">
-                <a16:creationId xmlns:a16="http://schemas.microsoft.com/office/drawing/2014/main" id="{EBA463E9-96AE-48E1-83F6-CA1EAB83E402}"/>
+                <a16:creationId xmlns:a16="http://schemas.microsoft.com/office/drawing/2014/main" id="{6851E88D-3DE2-4AB8-BCE7-8009E70C065B}"/>
               </a:ext>
             </a:extLst>
           </p:cNvPr>
@@ -14407,7 +14407,7 @@
           <p:cNvPr id="19" name="">
             <a:extLst xmlns:a="http://schemas.openxmlformats.org/drawingml/2006/main">
               <a:ext uri="{FF2B5EF4-FFF2-40B4-BE49-F238E27FC236}">
-                <a16:creationId xmlns:a16="http://schemas.microsoft.com/office/drawing/2014/main" id="{E9E34ACF-FCCF-4C0C-A8F1-C40A27B47E67}"/>
+                <a16:creationId xmlns:a16="http://schemas.microsoft.com/office/drawing/2014/main" id="{66DD1B3A-1F08-4998-9B08-3CC58859A284}"/>
               </a:ext>
             </a:extLst>
           </p:cNvPr>
@@ -14442,7 +14442,7 @@
           <p:cNvPr id="20" name="">
             <a:extLst xmlns:a="http://schemas.openxmlformats.org/drawingml/2006/main">
               <a:ext uri="{FF2B5EF4-FFF2-40B4-BE49-F238E27FC236}">
-                <a16:creationId xmlns:a16="http://schemas.microsoft.com/office/drawing/2014/main" id="{48969460-9E77-4029-A55E-068BD7DB234A}"/>
+                <a16:creationId xmlns:a16="http://schemas.microsoft.com/office/drawing/2014/main" id="{2CA7D2E2-730D-486F-9C36-4C5BAE95959D}"/>
               </a:ext>
             </a:extLst>
           </p:cNvPr>
@@ -14500,7 +14500,7 @@
           <p:cNvPr id="21" name="">
             <a:extLst xmlns:a="http://schemas.openxmlformats.org/drawingml/2006/main">
               <a:ext uri="{FF2B5EF4-FFF2-40B4-BE49-F238E27FC236}">
-                <a16:creationId xmlns:a16="http://schemas.microsoft.com/office/drawing/2014/main" id="{FF50FC5D-0213-4170-86C1-58083F54AC59}"/>
+                <a16:creationId xmlns:a16="http://schemas.microsoft.com/office/drawing/2014/main" id="{1086EBB6-883F-4885-8B3E-D091476AC3A3}"/>
               </a:ext>
             </a:extLst>
           </p:cNvPr>
@@ -14607,7 +14607,7 @@
     </p:spTree>
     <p:extLst>
       <p:ext uri="{BB962C8B-B14F-4D97-AF65-F5344CB8AC3E}">
-        <p14:creationId xmlns:p14="http://schemas.microsoft.com/office/powerpoint/2010/main" val="116681640"/>
+        <p14:creationId xmlns:p14="http://schemas.microsoft.com/office/powerpoint/2010/main" val="1663552678"/>
       </p:ext>
     </p:extLst>
   </p:cSld>
